--- a/public/lessons/year-6-maths/spring/week-12/solve-fraction-addition-problems/teaching-powerpoint-v1.pptx
+++ b/public/lessons/year-6-maths/spring/week-12/solve-fraction-addition-problems/teaching-powerpoint-v1.pptx
@@ -2,24 +2,24 @@
 <file path=ppt/presentation.xml><?xml version="1.0" encoding="utf-8"?>
 <p:presentation xmlns:p="http://schemas.openxmlformats.org/presentationml/2006/main">
   <p:sldMasterIdLst>
-    <p:sldMasterId xmlns:r="http://schemas.openxmlformats.org/officeDocument/2006/relationships" id="2147483648" r:id="R0abf906626ce4ced"/>
+    <p:sldMasterId xmlns:r="http://schemas.openxmlformats.org/officeDocument/2006/relationships" id="2147483648" r:id="R58bc0ebbf4344eca"/>
   </p:sldMasterIdLst>
   <p:notesMasterIdLst>
-    <p:notesMasterId xmlns:r="http://schemas.openxmlformats.org/officeDocument/2006/relationships" r:id="R7e437393543a4a55"/>
+    <p:notesMasterId xmlns:r="http://schemas.openxmlformats.org/officeDocument/2006/relationships" r:id="Ra31ba7e0ff0e4a91"/>
   </p:notesMasterIdLst>
   <p:sldIdLst>
-    <p:sldId xmlns:r="http://schemas.openxmlformats.org/officeDocument/2006/relationships" id="256" r:id="R0aff3bab300c481f"/>
-    <p:sldId xmlns:r="http://schemas.openxmlformats.org/officeDocument/2006/relationships" id="257" r:id="R0b7038045c574cd3"/>
-    <p:sldId xmlns:r="http://schemas.openxmlformats.org/officeDocument/2006/relationships" id="258" r:id="R120e9d35d0984346"/>
-    <p:sldId xmlns:r="http://schemas.openxmlformats.org/officeDocument/2006/relationships" id="259" r:id="R5582b4c36ef14215"/>
-    <p:sldId xmlns:r="http://schemas.openxmlformats.org/officeDocument/2006/relationships" id="260" r:id="R93b7d1a392fe4cc3"/>
-    <p:sldId xmlns:r="http://schemas.openxmlformats.org/officeDocument/2006/relationships" id="261" r:id="R773970eba4014259"/>
-    <p:sldId xmlns:r="http://schemas.openxmlformats.org/officeDocument/2006/relationships" id="262" r:id="Ra1db6f6fdaf44c7d"/>
-    <p:sldId xmlns:r="http://schemas.openxmlformats.org/officeDocument/2006/relationships" id="263" r:id="R862c6317cb6c4200"/>
-    <p:sldId xmlns:r="http://schemas.openxmlformats.org/officeDocument/2006/relationships" id="264" r:id="R1152fe8c5be341c8"/>
-    <p:sldId xmlns:r="http://schemas.openxmlformats.org/officeDocument/2006/relationships" id="265" r:id="Rd7ea4a80628a4e89"/>
-    <p:sldId xmlns:r="http://schemas.openxmlformats.org/officeDocument/2006/relationships" id="266" r:id="Rc2357d6b2d9d4a37"/>
-    <p:sldId xmlns:r="http://schemas.openxmlformats.org/officeDocument/2006/relationships" id="267" r:id="R1c4e8386d6ce4794"/>
+    <p:sldId xmlns:r="http://schemas.openxmlformats.org/officeDocument/2006/relationships" id="256" r:id="R62fb137630214558"/>
+    <p:sldId xmlns:r="http://schemas.openxmlformats.org/officeDocument/2006/relationships" id="257" r:id="Rba43071e216c4bd1"/>
+    <p:sldId xmlns:r="http://schemas.openxmlformats.org/officeDocument/2006/relationships" id="258" r:id="R1952b320c4bb4710"/>
+    <p:sldId xmlns:r="http://schemas.openxmlformats.org/officeDocument/2006/relationships" id="259" r:id="Rfb851602155d493f"/>
+    <p:sldId xmlns:r="http://schemas.openxmlformats.org/officeDocument/2006/relationships" id="260" r:id="R84c4a7f05c0a4c65"/>
+    <p:sldId xmlns:r="http://schemas.openxmlformats.org/officeDocument/2006/relationships" id="261" r:id="R4d44e1c4d6154774"/>
+    <p:sldId xmlns:r="http://schemas.openxmlformats.org/officeDocument/2006/relationships" id="262" r:id="Re6b5bac3b11443cf"/>
+    <p:sldId xmlns:r="http://schemas.openxmlformats.org/officeDocument/2006/relationships" id="263" r:id="R80c00a709d9941bb"/>
+    <p:sldId xmlns:r="http://schemas.openxmlformats.org/officeDocument/2006/relationships" id="264" r:id="Rb270711d25054c00"/>
+    <p:sldId xmlns:r="http://schemas.openxmlformats.org/officeDocument/2006/relationships" id="265" r:id="Rd141c1831eed4f9a"/>
+    <p:sldId xmlns:r="http://schemas.openxmlformats.org/officeDocument/2006/relationships" id="266" r:id="R40c8fa7c6029416c"/>
+    <p:sldId xmlns:r="http://schemas.openxmlformats.org/officeDocument/2006/relationships" id="267" r:id="Rcfefaa8ec2e74dfe"/>
   </p:sldIdLst>
   <p:sldSz cx="12192000" cy="6858000"/>
   <p:notesSz cx="6858000" cy="9144000"/>
@@ -873,7 +873,7 @@
           <a:lstStyle xmlns:a="http://schemas.openxmlformats.org/drawingml/2006/main"/>
           <a:p xmlns:a="http://schemas.openxmlformats.org/drawingml/2006/main">
             <a:r>
-              <a:t>I do. Reveal the question, setup and each calculation stage one click at a time. Pupils watch before copying. Model answer: 2 5/12 litres.</a:t>
+              <a:t>I do. Reveal the question, then reveal each mathematical change one click at a time. Point to the numbers and operation that changed before moving to the next line. Final answer: 2 5/12 litres.</a:t>
             </a:r>
           </a:p>
         </p:txBody>
@@ -1291,7 +1291,7 @@
   </p:cSld>
   <p:clrMap bg1="lt1" tx1="dk1" bg2="lt2" tx2="dk2" accent1="accent1" accent2="accent2" accent3="accent3" accent4="accent4" accent5="accent5" accent6="accent6" hlink="hlink" folHlink="folHlink"/>
   <p:sldLayoutIdLst>
-    <p:sldLayoutId xmlns:r="http://schemas.openxmlformats.org/officeDocument/2006/relationships" id="2147483649" r:id="R30b4aefeecb64224"/>
+    <p:sldLayoutId xmlns:r="http://schemas.openxmlformats.org/officeDocument/2006/relationships" id="2147483649" r:id="R1345fc4483bd4029"/>
   </p:sldLayoutIdLst>
   <p:txStyles>
     <p:titleStyle>
@@ -1842,7 +1842,7 @@
           <p:cNvPr id="12" name="">
             <a:extLst xmlns:a="http://schemas.openxmlformats.org/drawingml/2006/main">
               <a:ext uri="{FF2B5EF4-FFF2-40B4-BE49-F238E27FC236}">
-                <a16:creationId xmlns:a16="http://schemas.microsoft.com/office/drawing/2014/main" id="{021C3153-21DA-4F25-B2E7-71977E34DB84}"/>
+                <a16:creationId xmlns:a16="http://schemas.microsoft.com/office/drawing/2014/main" id="{E6487ADE-2E7C-4F6D-B579-1C5D89FEC163}"/>
               </a:ext>
             </a:extLst>
           </p:cNvPr>
@@ -1874,7 +1874,7 @@
           <p:cNvPr id="2" name="">
             <a:extLst xmlns:a="http://schemas.openxmlformats.org/drawingml/2006/main">
               <a:ext uri="{FF2B5EF4-FFF2-40B4-BE49-F238E27FC236}">
-                <a16:creationId xmlns:a16="http://schemas.microsoft.com/office/drawing/2014/main" id="{1090ACC6-ECED-41B4-8D81-6113B899C444}"/>
+                <a16:creationId xmlns:a16="http://schemas.microsoft.com/office/drawing/2014/main" id="{98F3A8CD-9170-425D-972A-477A5E434ED2}"/>
               </a:ext>
             </a:extLst>
           </p:cNvPr>
@@ -1931,7 +1931,7 @@
           <p:cNvPr id="3" name="">
             <a:extLst xmlns:a="http://schemas.openxmlformats.org/drawingml/2006/main">
               <a:ext uri="{FF2B5EF4-FFF2-40B4-BE49-F238E27FC236}">
-                <a16:creationId xmlns:a16="http://schemas.microsoft.com/office/drawing/2014/main" id="{17F9CCA4-447D-49BD-B9DE-D35429C57C24}"/>
+                <a16:creationId xmlns:a16="http://schemas.microsoft.com/office/drawing/2014/main" id="{9718CD5F-BC5E-4046-BA95-9A30D85D5A80}"/>
               </a:ext>
             </a:extLst>
           </p:cNvPr>
@@ -1965,7 +1965,7 @@
           <p:cNvPr id="4" name="">
             <a:extLst xmlns:a="http://schemas.openxmlformats.org/drawingml/2006/main">
               <a:ext uri="{FF2B5EF4-FFF2-40B4-BE49-F238E27FC236}">
-                <a16:creationId xmlns:a16="http://schemas.microsoft.com/office/drawing/2014/main" id="{D4567E4A-C22B-433C-9238-48385F90F268}"/>
+                <a16:creationId xmlns:a16="http://schemas.microsoft.com/office/drawing/2014/main" id="{044F734C-22F7-48C2-A8BC-9DEF0BD1BCC4}"/>
               </a:ext>
             </a:extLst>
           </p:cNvPr>
@@ -2022,7 +2022,7 @@
           <p:cNvPr id="5" name="">
             <a:extLst xmlns:a="http://schemas.openxmlformats.org/drawingml/2006/main">
               <a:ext uri="{FF2B5EF4-FFF2-40B4-BE49-F238E27FC236}">
-                <a16:creationId xmlns:a16="http://schemas.microsoft.com/office/drawing/2014/main" id="{C16DE60A-21A7-4E6C-95FB-29571BC966B6}"/>
+                <a16:creationId xmlns:a16="http://schemas.microsoft.com/office/drawing/2014/main" id="{D9C2CEE3-512D-4221-90B3-B87B44796600}"/>
               </a:ext>
             </a:extLst>
           </p:cNvPr>
@@ -2079,7 +2079,7 @@
           <p:cNvPr id="6" name="">
             <a:extLst xmlns:a="http://schemas.openxmlformats.org/drawingml/2006/main">
               <a:ext uri="{FF2B5EF4-FFF2-40B4-BE49-F238E27FC236}">
-                <a16:creationId xmlns:a16="http://schemas.microsoft.com/office/drawing/2014/main" id="{3E33DEB0-D71B-4F79-8033-13575CE9AC9C}"/>
+                <a16:creationId xmlns:a16="http://schemas.microsoft.com/office/drawing/2014/main" id="{4A71B5A9-7A61-47E3-914A-B67CE44993C2}"/>
               </a:ext>
             </a:extLst>
           </p:cNvPr>
@@ -2113,7 +2113,7 @@
           <p:cNvPr id="7" name="">
             <a:extLst xmlns:a="http://schemas.openxmlformats.org/drawingml/2006/main">
               <a:ext uri="{FF2B5EF4-FFF2-40B4-BE49-F238E27FC236}">
-                <a16:creationId xmlns:a16="http://schemas.microsoft.com/office/drawing/2014/main" id="{7D92B3BF-227E-4B18-9B16-95A41802435E}"/>
+                <a16:creationId xmlns:a16="http://schemas.microsoft.com/office/drawing/2014/main" id="{38547C21-F42E-4CBD-B06F-0EE50B8926D7}"/>
               </a:ext>
             </a:extLst>
           </p:cNvPr>
@@ -2170,7 +2170,7 @@
           <p:cNvPr id="8" name="">
             <a:extLst xmlns:a="http://schemas.openxmlformats.org/drawingml/2006/main">
               <a:ext uri="{FF2B5EF4-FFF2-40B4-BE49-F238E27FC236}">
-                <a16:creationId xmlns:a16="http://schemas.microsoft.com/office/drawing/2014/main" id="{ECE33009-669E-4B01-8D63-89F441729234}"/>
+                <a16:creationId xmlns:a16="http://schemas.microsoft.com/office/drawing/2014/main" id="{4E32B037-A962-42BD-BB71-05869B034C30}"/>
               </a:ext>
             </a:extLst>
           </p:cNvPr>
@@ -2227,7 +2227,7 @@
           <p:cNvPr id="9" name="">
             <a:extLst xmlns:a="http://schemas.openxmlformats.org/drawingml/2006/main">
               <a:ext uri="{FF2B5EF4-FFF2-40B4-BE49-F238E27FC236}">
-                <a16:creationId xmlns:a16="http://schemas.microsoft.com/office/drawing/2014/main" id="{8F01E135-AEC3-42B2-9980-3C26A40904DF}"/>
+                <a16:creationId xmlns:a16="http://schemas.microsoft.com/office/drawing/2014/main" id="{9B0542AC-4C3F-4D41-B3CF-B992ED9EE170}"/>
               </a:ext>
             </a:extLst>
           </p:cNvPr>
@@ -2284,7 +2284,7 @@
           <p:cNvPr id="10" name="">
             <a:extLst xmlns:a="http://schemas.openxmlformats.org/drawingml/2006/main">
               <a:ext uri="{FF2B5EF4-FFF2-40B4-BE49-F238E27FC236}">
-                <a16:creationId xmlns:a16="http://schemas.microsoft.com/office/drawing/2014/main" id="{C9ACE4C0-D409-406E-ACA1-687DFA482EB9}"/>
+                <a16:creationId xmlns:a16="http://schemas.microsoft.com/office/drawing/2014/main" id="{AAA1720C-123B-43AE-95CA-52B5D77063D7}"/>
               </a:ext>
             </a:extLst>
           </p:cNvPr>
@@ -2341,7 +2341,7 @@
           <p:cNvPr id="11" name="">
             <a:extLst xmlns:a="http://schemas.openxmlformats.org/drawingml/2006/main">
               <a:ext uri="{FF2B5EF4-FFF2-40B4-BE49-F238E27FC236}">
-                <a16:creationId xmlns:a16="http://schemas.microsoft.com/office/drawing/2014/main" id="{94F69D2C-0A64-4DB5-BCCB-A5B7E821E0B3}"/>
+                <a16:creationId xmlns:a16="http://schemas.microsoft.com/office/drawing/2014/main" id="{214FDAE4-350B-4A5A-99EC-10232DFE2367}"/>
               </a:ext>
             </a:extLst>
           </p:cNvPr>
@@ -2396,7 +2396,7 @@
     </p:spTree>
     <p:extLst>
       <p:ext uri="{BB962C8B-B14F-4D97-AF65-F5344CB8AC3E}">
-        <p14:creationId xmlns:p14="http://schemas.microsoft.com/office/powerpoint/2010/main" val="945483667"/>
+        <p14:creationId xmlns:p14="http://schemas.microsoft.com/office/powerpoint/2010/main" val="2099244424"/>
       </p:ext>
     </p:extLst>
   </p:cSld>
@@ -2427,7 +2427,7 @@
           <p:cNvPr id="14" name="">
             <a:extLst xmlns:a="http://schemas.openxmlformats.org/drawingml/2006/main">
               <a:ext uri="{FF2B5EF4-FFF2-40B4-BE49-F238E27FC236}">
-                <a16:creationId xmlns:a16="http://schemas.microsoft.com/office/drawing/2014/main" id="{925933B2-97AD-40FE-8C0F-D5C939863D5B}"/>
+                <a16:creationId xmlns:a16="http://schemas.microsoft.com/office/drawing/2014/main" id="{4045AC96-7017-476E-BE12-F8EFFFBF3427}"/>
               </a:ext>
             </a:extLst>
           </p:cNvPr>
@@ -2459,7 +2459,7 @@
           <p:cNvPr id="2" name="">
             <a:extLst xmlns:a="http://schemas.openxmlformats.org/drawingml/2006/main">
               <a:ext uri="{FF2B5EF4-FFF2-40B4-BE49-F238E27FC236}">
-                <a16:creationId xmlns:a16="http://schemas.microsoft.com/office/drawing/2014/main" id="{97A2383C-88FE-4869-A50A-A48FDA07C980}"/>
+                <a16:creationId xmlns:a16="http://schemas.microsoft.com/office/drawing/2014/main" id="{D86BA713-B6FC-4559-8071-EC73480DC988}"/>
               </a:ext>
             </a:extLst>
           </p:cNvPr>
@@ -2516,7 +2516,7 @@
           <p:cNvPr id="3" name="">
             <a:extLst xmlns:a="http://schemas.openxmlformats.org/drawingml/2006/main">
               <a:ext uri="{FF2B5EF4-FFF2-40B4-BE49-F238E27FC236}">
-                <a16:creationId xmlns:a16="http://schemas.microsoft.com/office/drawing/2014/main" id="{6A3F0166-35DC-4015-9076-30ED9EA8A1F5}"/>
+                <a16:creationId xmlns:a16="http://schemas.microsoft.com/office/drawing/2014/main" id="{022418C6-7921-4347-9264-4213DC35F123}"/>
               </a:ext>
             </a:extLst>
           </p:cNvPr>
@@ -2548,7 +2548,7 @@
           <p:cNvPr id="4" name="">
             <a:extLst xmlns:a="http://schemas.openxmlformats.org/drawingml/2006/main">
               <a:ext uri="{FF2B5EF4-FFF2-40B4-BE49-F238E27FC236}">
-                <a16:creationId xmlns:a16="http://schemas.microsoft.com/office/drawing/2014/main" id="{20B57DE2-179C-4517-B22E-36F4FCA4E8AB}"/>
+                <a16:creationId xmlns:a16="http://schemas.microsoft.com/office/drawing/2014/main" id="{C748BD12-4C13-4803-A232-F92EEBFEA3E7}"/>
               </a:ext>
             </a:extLst>
           </p:cNvPr>
@@ -2605,7 +2605,7 @@
           <p:cNvPr id="5" name="">
             <a:extLst xmlns:a="http://schemas.openxmlformats.org/drawingml/2006/main">
               <a:ext uri="{FF2B5EF4-FFF2-40B4-BE49-F238E27FC236}">
-                <a16:creationId xmlns:a16="http://schemas.microsoft.com/office/drawing/2014/main" id="{CA4A4266-7AFA-42F7-A82D-C6A1FCD45773}"/>
+                <a16:creationId xmlns:a16="http://schemas.microsoft.com/office/drawing/2014/main" id="{410A5C1F-162B-49B9-975E-B22660878580}"/>
               </a:ext>
             </a:extLst>
           </p:cNvPr>
@@ -2662,7 +2662,7 @@
           <p:cNvPr id="6" name="">
             <a:extLst xmlns:a="http://schemas.openxmlformats.org/drawingml/2006/main">
               <a:ext uri="{FF2B5EF4-FFF2-40B4-BE49-F238E27FC236}">
-                <a16:creationId xmlns:a16="http://schemas.microsoft.com/office/drawing/2014/main" id="{AA60351B-BD8D-4044-918B-FFF888130EC3}"/>
+                <a16:creationId xmlns:a16="http://schemas.microsoft.com/office/drawing/2014/main" id="{375A2E10-0AB2-4186-B4BB-7804F4C88C7D}"/>
               </a:ext>
             </a:extLst>
           </p:cNvPr>
@@ -2719,7 +2719,7 @@
           <p:cNvPr id="7" name="">
             <a:extLst xmlns:a="http://schemas.openxmlformats.org/drawingml/2006/main">
               <a:ext uri="{FF2B5EF4-FFF2-40B4-BE49-F238E27FC236}">
-                <a16:creationId xmlns:a16="http://schemas.microsoft.com/office/drawing/2014/main" id="{73A6AA90-97B7-41FB-90BC-97E96D324712}"/>
+                <a16:creationId xmlns:a16="http://schemas.microsoft.com/office/drawing/2014/main" id="{09A447BC-D7DC-427E-B188-BA7B648C8C50}"/>
               </a:ext>
             </a:extLst>
           </p:cNvPr>
@@ -2751,7 +2751,7 @@
           <p:cNvPr id="8" name="">
             <a:extLst xmlns:a="http://schemas.openxmlformats.org/drawingml/2006/main">
               <a:ext uri="{FF2B5EF4-FFF2-40B4-BE49-F238E27FC236}">
-                <a16:creationId xmlns:a16="http://schemas.microsoft.com/office/drawing/2014/main" id="{FD00D42F-DC89-4F3C-AE4C-429FFB7D75ED}"/>
+                <a16:creationId xmlns:a16="http://schemas.microsoft.com/office/drawing/2014/main" id="{2ED82E9D-24C6-48AC-A1DF-C4113B771592}"/>
               </a:ext>
             </a:extLst>
           </p:cNvPr>
@@ -2808,7 +2808,7 @@
           <p:cNvPr id="9" name="">
             <a:extLst xmlns:a="http://schemas.openxmlformats.org/drawingml/2006/main">
               <a:ext uri="{FF2B5EF4-FFF2-40B4-BE49-F238E27FC236}">
-                <a16:creationId xmlns:a16="http://schemas.microsoft.com/office/drawing/2014/main" id="{4A195659-9116-44B2-BFC4-5D05B38D0DDB}"/>
+                <a16:creationId xmlns:a16="http://schemas.microsoft.com/office/drawing/2014/main" id="{EDA0E6CE-D96B-427B-8A02-6D08D28D86E8}"/>
               </a:ext>
             </a:extLst>
           </p:cNvPr>
@@ -2865,7 +2865,7 @@
           <p:cNvPr id="10" name="">
             <a:extLst xmlns:a="http://schemas.openxmlformats.org/drawingml/2006/main">
               <a:ext uri="{FF2B5EF4-FFF2-40B4-BE49-F238E27FC236}">
-                <a16:creationId xmlns:a16="http://schemas.microsoft.com/office/drawing/2014/main" id="{4586D827-6575-4FD1-9A20-3EC2197F4C59}"/>
+                <a16:creationId xmlns:a16="http://schemas.microsoft.com/office/drawing/2014/main" id="{88CBDF5C-9841-48FF-B449-7D4AD265EDD7}"/>
               </a:ext>
             </a:extLst>
           </p:cNvPr>
@@ -2922,7 +2922,7 @@
           <p:cNvPr id="11" name="">
             <a:extLst xmlns:a="http://schemas.openxmlformats.org/drawingml/2006/main">
               <a:ext uri="{FF2B5EF4-FFF2-40B4-BE49-F238E27FC236}">
-                <a16:creationId xmlns:a16="http://schemas.microsoft.com/office/drawing/2014/main" id="{715B5DB9-C23F-4A9F-8879-FE209790ACB3}"/>
+                <a16:creationId xmlns:a16="http://schemas.microsoft.com/office/drawing/2014/main" id="{16717811-1201-4915-B8ED-17B61E3BE5AC}"/>
               </a:ext>
             </a:extLst>
           </p:cNvPr>
@@ -2979,7 +2979,7 @@
           <p:cNvPr id="12" name="">
             <a:extLst xmlns:a="http://schemas.openxmlformats.org/drawingml/2006/main">
               <a:ext uri="{FF2B5EF4-FFF2-40B4-BE49-F238E27FC236}">
-                <a16:creationId xmlns:a16="http://schemas.microsoft.com/office/drawing/2014/main" id="{A62D596E-C08C-45FC-A056-F021564CC3A0}"/>
+                <a16:creationId xmlns:a16="http://schemas.microsoft.com/office/drawing/2014/main" id="{2C8FDB08-6072-41BA-BF1E-CB92219ACBC4}"/>
               </a:ext>
             </a:extLst>
           </p:cNvPr>
@@ -3036,7 +3036,7 @@
           <p:cNvPr id="13" name="">
             <a:extLst xmlns:a="http://schemas.openxmlformats.org/drawingml/2006/main">
               <a:ext uri="{FF2B5EF4-FFF2-40B4-BE49-F238E27FC236}">
-                <a16:creationId xmlns:a16="http://schemas.microsoft.com/office/drawing/2014/main" id="{BABA7CF4-015B-489D-B2D9-4161BFDFA224}"/>
+                <a16:creationId xmlns:a16="http://schemas.microsoft.com/office/drawing/2014/main" id="{85F63456-DB4C-47E7-8F8B-02331682C0E5}"/>
               </a:ext>
             </a:extLst>
           </p:cNvPr>
@@ -3091,7 +3091,7 @@
     </p:spTree>
     <p:extLst>
       <p:ext uri="{BB962C8B-B14F-4D97-AF65-F5344CB8AC3E}">
-        <p14:creationId xmlns:p14="http://schemas.microsoft.com/office/powerpoint/2010/main" val="800384656"/>
+        <p14:creationId xmlns:p14="http://schemas.microsoft.com/office/powerpoint/2010/main" val="492188851"/>
       </p:ext>
     </p:extLst>
   </p:cSld>
@@ -3292,7 +3292,7 @@
           <p:cNvPr id="19" name="">
             <a:extLst xmlns:a="http://schemas.openxmlformats.org/drawingml/2006/main">
               <a:ext uri="{FF2B5EF4-FFF2-40B4-BE49-F238E27FC236}">
-                <a16:creationId xmlns:a16="http://schemas.microsoft.com/office/drawing/2014/main" id="{26757572-DEDD-4D31-BD55-495A0F4EC312}"/>
+                <a16:creationId xmlns:a16="http://schemas.microsoft.com/office/drawing/2014/main" id="{5C3954D0-974D-47CB-BEAF-4BE3C4CAA21B}"/>
               </a:ext>
             </a:extLst>
           </p:cNvPr>
@@ -3324,7 +3324,7 @@
           <p:cNvPr id="2" name="">
             <a:extLst xmlns:a="http://schemas.openxmlformats.org/drawingml/2006/main">
               <a:ext uri="{FF2B5EF4-FFF2-40B4-BE49-F238E27FC236}">
-                <a16:creationId xmlns:a16="http://schemas.microsoft.com/office/drawing/2014/main" id="{A377DB9A-23A1-4C4E-9D55-4FED9F7D1EA9}"/>
+                <a16:creationId xmlns:a16="http://schemas.microsoft.com/office/drawing/2014/main" id="{3203AB02-F1AB-41D0-AA37-B939B39EF5D4}"/>
               </a:ext>
             </a:extLst>
           </p:cNvPr>
@@ -3381,7 +3381,7 @@
           <p:cNvPr id="3" name="">
             <a:extLst xmlns:a="http://schemas.openxmlformats.org/drawingml/2006/main">
               <a:ext uri="{FF2B5EF4-FFF2-40B4-BE49-F238E27FC236}">
-                <a16:creationId xmlns:a16="http://schemas.microsoft.com/office/drawing/2014/main" id="{DCFAA894-BBB3-488C-A251-BF29A893AAF1}"/>
+                <a16:creationId xmlns:a16="http://schemas.microsoft.com/office/drawing/2014/main" id="{2E2BC718-3E4E-4308-A7C2-331A1CA156B0}"/>
               </a:ext>
             </a:extLst>
           </p:cNvPr>
@@ -3413,7 +3413,7 @@
           <p:cNvPr id="4" name="">
             <a:extLst xmlns:a="http://schemas.openxmlformats.org/drawingml/2006/main">
               <a:ext uri="{FF2B5EF4-FFF2-40B4-BE49-F238E27FC236}">
-                <a16:creationId xmlns:a16="http://schemas.microsoft.com/office/drawing/2014/main" id="{10155E97-0E5C-4FE5-9AC9-427B7F873616}"/>
+                <a16:creationId xmlns:a16="http://schemas.microsoft.com/office/drawing/2014/main" id="{FCA3FC7C-5E4E-45CF-8A35-0CACB9ECDACA}"/>
               </a:ext>
             </a:extLst>
           </p:cNvPr>
@@ -3470,7 +3470,7 @@
           <p:cNvPr id="5" name="">
             <a:extLst xmlns:a="http://schemas.openxmlformats.org/drawingml/2006/main">
               <a:ext uri="{FF2B5EF4-FFF2-40B4-BE49-F238E27FC236}">
-                <a16:creationId xmlns:a16="http://schemas.microsoft.com/office/drawing/2014/main" id="{B4A0E272-60D5-4DBF-AEA9-336AD35F3232}"/>
+                <a16:creationId xmlns:a16="http://schemas.microsoft.com/office/drawing/2014/main" id="{00818358-6099-4CCE-AAA7-B4CEE5CE42BB}"/>
               </a:ext>
             </a:extLst>
           </p:cNvPr>
@@ -3527,7 +3527,7 @@
           <p:cNvPr id="6" name="">
             <a:extLst xmlns:a="http://schemas.openxmlformats.org/drawingml/2006/main">
               <a:ext uri="{FF2B5EF4-FFF2-40B4-BE49-F238E27FC236}">
-                <a16:creationId xmlns:a16="http://schemas.microsoft.com/office/drawing/2014/main" id="{3F7009D9-3D98-48FC-B138-59F42096F2D4}"/>
+                <a16:creationId xmlns:a16="http://schemas.microsoft.com/office/drawing/2014/main" id="{AEB8F226-7A63-42DC-8E9A-2C4155AEB60D}"/>
               </a:ext>
             </a:extLst>
           </p:cNvPr>
@@ -3584,7 +3584,7 @@
           <p:cNvPr id="7" name="">
             <a:extLst xmlns:a="http://schemas.openxmlformats.org/drawingml/2006/main">
               <a:ext uri="{FF2B5EF4-FFF2-40B4-BE49-F238E27FC236}">
-                <a16:creationId xmlns:a16="http://schemas.microsoft.com/office/drawing/2014/main" id="{EE13A67B-5805-45FE-82A0-972D08CFC2E2}"/>
+                <a16:creationId xmlns:a16="http://schemas.microsoft.com/office/drawing/2014/main" id="{9CE94D04-A8DE-49E5-80C4-7ABDFFFBE3E1}"/>
               </a:ext>
             </a:extLst>
           </p:cNvPr>
@@ -3616,7 +3616,7 @@
           <p:cNvPr id="8" name="">
             <a:extLst xmlns:a="http://schemas.openxmlformats.org/drawingml/2006/main">
               <a:ext uri="{FF2B5EF4-FFF2-40B4-BE49-F238E27FC236}">
-                <a16:creationId xmlns:a16="http://schemas.microsoft.com/office/drawing/2014/main" id="{5E17AC0B-E592-48F7-B6AA-F1F76866768B}"/>
+                <a16:creationId xmlns:a16="http://schemas.microsoft.com/office/drawing/2014/main" id="{5AAFA4A3-FE73-4FC0-82F7-CFB83E30F533}"/>
               </a:ext>
             </a:extLst>
           </p:cNvPr>
@@ -3673,7 +3673,7 @@
           <p:cNvPr id="9" name="">
             <a:extLst xmlns:a="http://schemas.openxmlformats.org/drawingml/2006/main">
               <a:ext uri="{FF2B5EF4-FFF2-40B4-BE49-F238E27FC236}">
-                <a16:creationId xmlns:a16="http://schemas.microsoft.com/office/drawing/2014/main" id="{4A1B0FCB-58D0-4D12-98DB-CC667548F02F}"/>
+                <a16:creationId xmlns:a16="http://schemas.microsoft.com/office/drawing/2014/main" id="{3C56225A-8B71-458F-9127-ABEDF2003F8C}"/>
               </a:ext>
             </a:extLst>
           </p:cNvPr>
@@ -3730,7 +3730,7 @@
           <p:cNvPr id="10" name="">
             <a:extLst xmlns:a="http://schemas.openxmlformats.org/drawingml/2006/main">
               <a:ext uri="{FF2B5EF4-FFF2-40B4-BE49-F238E27FC236}">
-                <a16:creationId xmlns:a16="http://schemas.microsoft.com/office/drawing/2014/main" id="{F96FB69C-57F7-44AA-8E4B-D7B196ADC978}"/>
+                <a16:creationId xmlns:a16="http://schemas.microsoft.com/office/drawing/2014/main" id="{1E358853-2BAD-4083-AED5-708108ED96F7}"/>
               </a:ext>
             </a:extLst>
           </p:cNvPr>
@@ -3787,7 +3787,7 @@
           <p:cNvPr id="11" name="">
             <a:extLst xmlns:a="http://schemas.openxmlformats.org/drawingml/2006/main">
               <a:ext uri="{FF2B5EF4-FFF2-40B4-BE49-F238E27FC236}">
-                <a16:creationId xmlns:a16="http://schemas.microsoft.com/office/drawing/2014/main" id="{330D6A2E-6552-4624-9504-B292F5A06505}"/>
+                <a16:creationId xmlns:a16="http://schemas.microsoft.com/office/drawing/2014/main" id="{247A78B3-7910-4230-918B-E02FF2EBDCC2}"/>
               </a:ext>
             </a:extLst>
           </p:cNvPr>
@@ -3821,7 +3821,7 @@
           <p:cNvPr id="12" name="">
             <a:extLst xmlns:a="http://schemas.openxmlformats.org/drawingml/2006/main">
               <a:ext uri="{FF2B5EF4-FFF2-40B4-BE49-F238E27FC236}">
-                <a16:creationId xmlns:a16="http://schemas.microsoft.com/office/drawing/2014/main" id="{747DC8CA-75A3-4582-B68B-B29A729BF9EE}"/>
+                <a16:creationId xmlns:a16="http://schemas.microsoft.com/office/drawing/2014/main" id="{DB20C50B-9123-48EE-8BBC-BA02EE8FA0D5}"/>
               </a:ext>
             </a:extLst>
           </p:cNvPr>
@@ -3878,7 +3878,7 @@
           <p:cNvPr id="13" name="">
             <a:extLst xmlns:a="http://schemas.openxmlformats.org/drawingml/2006/main">
               <a:ext uri="{FF2B5EF4-FFF2-40B4-BE49-F238E27FC236}">
-                <a16:creationId xmlns:a16="http://schemas.microsoft.com/office/drawing/2014/main" id="{60A6C4F5-6BA0-43C1-9D4A-24D1E2F944CD}"/>
+                <a16:creationId xmlns:a16="http://schemas.microsoft.com/office/drawing/2014/main" id="{EC03104A-EA40-441E-935F-96623AF53AC4}"/>
               </a:ext>
             </a:extLst>
           </p:cNvPr>
@@ -3935,7 +3935,7 @@
           <p:cNvPr id="14" name="">
             <a:extLst xmlns:a="http://schemas.openxmlformats.org/drawingml/2006/main">
               <a:ext uri="{FF2B5EF4-FFF2-40B4-BE49-F238E27FC236}">
-                <a16:creationId xmlns:a16="http://schemas.microsoft.com/office/drawing/2014/main" id="{F54992E9-F6C4-43F7-BCBF-DC86E86700D9}"/>
+                <a16:creationId xmlns:a16="http://schemas.microsoft.com/office/drawing/2014/main" id="{40A0BF72-0A9A-445A-A188-37F7263F3C51}"/>
               </a:ext>
             </a:extLst>
           </p:cNvPr>
@@ -3992,7 +3992,7 @@
           <p:cNvPr id="15" name="">
             <a:extLst xmlns:a="http://schemas.openxmlformats.org/drawingml/2006/main">
               <a:ext uri="{FF2B5EF4-FFF2-40B4-BE49-F238E27FC236}">
-                <a16:creationId xmlns:a16="http://schemas.microsoft.com/office/drawing/2014/main" id="{62CCE3E4-2731-40AE-9532-92549AB801B8}"/>
+                <a16:creationId xmlns:a16="http://schemas.microsoft.com/office/drawing/2014/main" id="{DE408178-7DCC-4E96-B9E5-886AFD5CFCE5}"/>
               </a:ext>
             </a:extLst>
           </p:cNvPr>
@@ -4026,7 +4026,7 @@
           <p:cNvPr id="16" name="">
             <a:extLst xmlns:a="http://schemas.openxmlformats.org/drawingml/2006/main">
               <a:ext uri="{FF2B5EF4-FFF2-40B4-BE49-F238E27FC236}">
-                <a16:creationId xmlns:a16="http://schemas.microsoft.com/office/drawing/2014/main" id="{4D7C36B4-F363-411B-8604-464C75657C26}"/>
+                <a16:creationId xmlns:a16="http://schemas.microsoft.com/office/drawing/2014/main" id="{C1D18D4B-F4D5-4D6C-8E19-C0945A52F887}"/>
               </a:ext>
             </a:extLst>
           </p:cNvPr>
@@ -4083,7 +4083,7 @@
           <p:cNvPr id="17" name="">
             <a:extLst xmlns:a="http://schemas.openxmlformats.org/drawingml/2006/main">
               <a:ext uri="{FF2B5EF4-FFF2-40B4-BE49-F238E27FC236}">
-                <a16:creationId xmlns:a16="http://schemas.microsoft.com/office/drawing/2014/main" id="{D94C0AE7-4506-4631-B530-B0E6008601C5}"/>
+                <a16:creationId xmlns:a16="http://schemas.microsoft.com/office/drawing/2014/main" id="{842DB73B-F6A4-4DC7-8B4E-3FB36D3CFA35}"/>
               </a:ext>
             </a:extLst>
           </p:cNvPr>
@@ -4140,7 +4140,7 @@
           <p:cNvPr id="18" name="">
             <a:extLst xmlns:a="http://schemas.openxmlformats.org/drawingml/2006/main">
               <a:ext uri="{FF2B5EF4-FFF2-40B4-BE49-F238E27FC236}">
-                <a16:creationId xmlns:a16="http://schemas.microsoft.com/office/drawing/2014/main" id="{1E8ECCA2-E17F-4BF3-859C-0ECE190FC1C8}"/>
+                <a16:creationId xmlns:a16="http://schemas.microsoft.com/office/drawing/2014/main" id="{6DC02B47-18BA-4A3F-94E2-8034B963E4EC}"/>
               </a:ext>
             </a:extLst>
           </p:cNvPr>
@@ -4195,7 +4195,7 @@
     </p:spTree>
     <p:extLst>
       <p:ext uri="{BB962C8B-B14F-4D97-AF65-F5344CB8AC3E}">
-        <p14:creationId xmlns:p14="http://schemas.microsoft.com/office/powerpoint/2010/main" val="990170721"/>
+        <p14:creationId xmlns:p14="http://schemas.microsoft.com/office/powerpoint/2010/main" val="1979483287"/>
       </p:ext>
     </p:extLst>
   </p:cSld>
@@ -4350,7 +4350,7 @@
           <p:cNvPr id="23" name="">
             <a:extLst xmlns:a="http://schemas.openxmlformats.org/drawingml/2006/main">
               <a:ext uri="{FF2B5EF4-FFF2-40B4-BE49-F238E27FC236}">
-                <a16:creationId xmlns:a16="http://schemas.microsoft.com/office/drawing/2014/main" id="{7A3568CF-2CA1-40A2-B221-D2305DDA3797}"/>
+                <a16:creationId xmlns:a16="http://schemas.microsoft.com/office/drawing/2014/main" id="{AA69E4DA-0348-4E7E-99B2-64B879FBFBB0}"/>
               </a:ext>
             </a:extLst>
           </p:cNvPr>
@@ -4382,7 +4382,7 @@
           <p:cNvPr id="2" name="">
             <a:extLst xmlns:a="http://schemas.openxmlformats.org/drawingml/2006/main">
               <a:ext uri="{FF2B5EF4-FFF2-40B4-BE49-F238E27FC236}">
-                <a16:creationId xmlns:a16="http://schemas.microsoft.com/office/drawing/2014/main" id="{0C5C37F0-AA98-46AA-9568-45EA84622705}"/>
+                <a16:creationId xmlns:a16="http://schemas.microsoft.com/office/drawing/2014/main" id="{B83F38C6-6E26-454E-B3E6-CC45DBC4CE76}"/>
               </a:ext>
             </a:extLst>
           </p:cNvPr>
@@ -4439,7 +4439,7 @@
           <p:cNvPr id="3" name="">
             <a:extLst xmlns:a="http://schemas.openxmlformats.org/drawingml/2006/main">
               <a:ext uri="{FF2B5EF4-FFF2-40B4-BE49-F238E27FC236}">
-                <a16:creationId xmlns:a16="http://schemas.microsoft.com/office/drawing/2014/main" id="{FDFF7AA8-C2F4-45A8-8111-55C736E20773}"/>
+                <a16:creationId xmlns:a16="http://schemas.microsoft.com/office/drawing/2014/main" id="{8A0CD74C-D407-4ADE-9CBC-4E64E5D60D93}"/>
               </a:ext>
             </a:extLst>
           </p:cNvPr>
@@ -4471,7 +4471,7 @@
           <p:cNvPr id="4" name="">
             <a:extLst xmlns:a="http://schemas.openxmlformats.org/drawingml/2006/main">
               <a:ext uri="{FF2B5EF4-FFF2-40B4-BE49-F238E27FC236}">
-                <a16:creationId xmlns:a16="http://schemas.microsoft.com/office/drawing/2014/main" id="{5990EAEE-6943-47C6-88C6-FE30B801E6DC}"/>
+                <a16:creationId xmlns:a16="http://schemas.microsoft.com/office/drawing/2014/main" id="{7D38EAD8-9EB9-4EA0-AC18-EDDD917ADC11}"/>
               </a:ext>
             </a:extLst>
           </p:cNvPr>
@@ -4528,7 +4528,7 @@
           <p:cNvPr id="5" name="">
             <a:extLst xmlns:a="http://schemas.openxmlformats.org/drawingml/2006/main">
               <a:ext uri="{FF2B5EF4-FFF2-40B4-BE49-F238E27FC236}">
-                <a16:creationId xmlns:a16="http://schemas.microsoft.com/office/drawing/2014/main" id="{0456AEF4-2C39-487D-B5D5-9771ECF86D26}"/>
+                <a16:creationId xmlns:a16="http://schemas.microsoft.com/office/drawing/2014/main" id="{9C882CE0-168B-4C70-81F0-2BD1B50ED9F3}"/>
               </a:ext>
             </a:extLst>
           </p:cNvPr>
@@ -4585,7 +4585,7 @@
           <p:cNvPr id="6" name="">
             <a:extLst xmlns:a="http://schemas.openxmlformats.org/drawingml/2006/main">
               <a:ext uri="{FF2B5EF4-FFF2-40B4-BE49-F238E27FC236}">
-                <a16:creationId xmlns:a16="http://schemas.microsoft.com/office/drawing/2014/main" id="{29BB478F-E168-4CA5-BC5C-43823544AA48}"/>
+                <a16:creationId xmlns:a16="http://schemas.microsoft.com/office/drawing/2014/main" id="{83EFF20B-70AE-4790-AA1A-1B183E88134A}"/>
               </a:ext>
             </a:extLst>
           </p:cNvPr>
@@ -4642,7 +4642,7 @@
           <p:cNvPr id="7" name="">
             <a:extLst xmlns:a="http://schemas.openxmlformats.org/drawingml/2006/main">
               <a:ext uri="{FF2B5EF4-FFF2-40B4-BE49-F238E27FC236}">
-                <a16:creationId xmlns:a16="http://schemas.microsoft.com/office/drawing/2014/main" id="{97C28D6F-67AC-4BAF-A688-42BC6371ED9B}"/>
+                <a16:creationId xmlns:a16="http://schemas.microsoft.com/office/drawing/2014/main" id="{F110E860-C529-4A52-B675-821D2BE53317}"/>
               </a:ext>
             </a:extLst>
           </p:cNvPr>
@@ -4674,7 +4674,7 @@
           <p:cNvPr id="8" name="">
             <a:extLst xmlns:a="http://schemas.openxmlformats.org/drawingml/2006/main">
               <a:ext uri="{FF2B5EF4-FFF2-40B4-BE49-F238E27FC236}">
-                <a16:creationId xmlns:a16="http://schemas.microsoft.com/office/drawing/2014/main" id="{D9275952-E446-4681-BFAE-0B535D34BA35}"/>
+                <a16:creationId xmlns:a16="http://schemas.microsoft.com/office/drawing/2014/main" id="{3959044A-8CE3-46C3-A36C-730C0CD1B7C1}"/>
               </a:ext>
             </a:extLst>
           </p:cNvPr>
@@ -4731,7 +4731,7 @@
           <p:cNvPr id="9" name="">
             <a:extLst xmlns:a="http://schemas.openxmlformats.org/drawingml/2006/main">
               <a:ext uri="{FF2B5EF4-FFF2-40B4-BE49-F238E27FC236}">
-                <a16:creationId xmlns:a16="http://schemas.microsoft.com/office/drawing/2014/main" id="{EED51A9A-1D7C-4D91-BEF7-2F71784D8888}"/>
+                <a16:creationId xmlns:a16="http://schemas.microsoft.com/office/drawing/2014/main" id="{52C08893-2F86-4FE1-9DED-5B4AA12C92D4}"/>
               </a:ext>
             </a:extLst>
           </p:cNvPr>
@@ -4788,7 +4788,7 @@
           <p:cNvPr id="10" name="">
             <a:extLst xmlns:a="http://schemas.openxmlformats.org/drawingml/2006/main">
               <a:ext uri="{FF2B5EF4-FFF2-40B4-BE49-F238E27FC236}">
-                <a16:creationId xmlns:a16="http://schemas.microsoft.com/office/drawing/2014/main" id="{03A45DF1-5B4B-4B85-A664-8E6EB1CE21EE}"/>
+                <a16:creationId xmlns:a16="http://schemas.microsoft.com/office/drawing/2014/main" id="{0A0FDABE-D97F-4DFF-92BD-761F0FF6D616}"/>
               </a:ext>
             </a:extLst>
           </p:cNvPr>
@@ -4822,7 +4822,7 @@
           <p:cNvPr id="11" name="">
             <a:extLst xmlns:a="http://schemas.openxmlformats.org/drawingml/2006/main">
               <a:ext uri="{FF2B5EF4-FFF2-40B4-BE49-F238E27FC236}">
-                <a16:creationId xmlns:a16="http://schemas.microsoft.com/office/drawing/2014/main" id="{6AB564D5-82C6-4704-AF62-1B67C317253A}"/>
+                <a16:creationId xmlns:a16="http://schemas.microsoft.com/office/drawing/2014/main" id="{AB7E7E7E-E4A7-4610-9017-DF2A1B57C559}"/>
               </a:ext>
             </a:extLst>
           </p:cNvPr>
@@ -4854,7 +4854,7 @@
           <p:cNvPr id="12" name="">
             <a:extLst xmlns:a="http://schemas.openxmlformats.org/drawingml/2006/main">
               <a:ext uri="{FF2B5EF4-FFF2-40B4-BE49-F238E27FC236}">
-                <a16:creationId xmlns:a16="http://schemas.microsoft.com/office/drawing/2014/main" id="{1E68058C-D2C6-4E5E-B26B-67994DDCFC87}"/>
+                <a16:creationId xmlns:a16="http://schemas.microsoft.com/office/drawing/2014/main" id="{99C0B4CE-7A25-4222-A2CE-160693955686}"/>
               </a:ext>
             </a:extLst>
           </p:cNvPr>
@@ -4911,7 +4911,7 @@
           <p:cNvPr id="13" name="">
             <a:extLst xmlns:a="http://schemas.openxmlformats.org/drawingml/2006/main">
               <a:ext uri="{FF2B5EF4-FFF2-40B4-BE49-F238E27FC236}">
-                <a16:creationId xmlns:a16="http://schemas.microsoft.com/office/drawing/2014/main" id="{B3D46DF1-7A22-43B4-AA3C-6BB9D03AC1E6}"/>
+                <a16:creationId xmlns:a16="http://schemas.microsoft.com/office/drawing/2014/main" id="{ED12263B-E2B5-49CB-8F3E-1664A179373A}"/>
               </a:ext>
             </a:extLst>
           </p:cNvPr>
@@ -4968,7 +4968,7 @@
           <p:cNvPr id="14" name="">
             <a:extLst xmlns:a="http://schemas.openxmlformats.org/drawingml/2006/main">
               <a:ext uri="{FF2B5EF4-FFF2-40B4-BE49-F238E27FC236}">
-                <a16:creationId xmlns:a16="http://schemas.microsoft.com/office/drawing/2014/main" id="{31B48C2F-2482-47EF-BEBB-53FD82DA5D0D}"/>
+                <a16:creationId xmlns:a16="http://schemas.microsoft.com/office/drawing/2014/main" id="{2C8F25C2-71AE-4708-9853-C1D4AC08657B}"/>
               </a:ext>
             </a:extLst>
           </p:cNvPr>
@@ -5002,7 +5002,7 @@
           <p:cNvPr id="15" name="">
             <a:extLst xmlns:a="http://schemas.openxmlformats.org/drawingml/2006/main">
               <a:ext uri="{FF2B5EF4-FFF2-40B4-BE49-F238E27FC236}">
-                <a16:creationId xmlns:a16="http://schemas.microsoft.com/office/drawing/2014/main" id="{2DF4FF58-8A08-4D14-9AEA-7016D423A30C}"/>
+                <a16:creationId xmlns:a16="http://schemas.microsoft.com/office/drawing/2014/main" id="{48EAC1D3-B19D-4CB5-99E0-8D1416D35960}"/>
               </a:ext>
             </a:extLst>
           </p:cNvPr>
@@ -5034,7 +5034,7 @@
           <p:cNvPr id="16" name="">
             <a:extLst xmlns:a="http://schemas.openxmlformats.org/drawingml/2006/main">
               <a:ext uri="{FF2B5EF4-FFF2-40B4-BE49-F238E27FC236}">
-                <a16:creationId xmlns:a16="http://schemas.microsoft.com/office/drawing/2014/main" id="{CA7F8551-068A-4B89-B549-69176788C5E3}"/>
+                <a16:creationId xmlns:a16="http://schemas.microsoft.com/office/drawing/2014/main" id="{DE4FFAA4-AD91-4FDC-AB53-498184996B52}"/>
               </a:ext>
             </a:extLst>
           </p:cNvPr>
@@ -5091,7 +5091,7 @@
           <p:cNvPr id="17" name="">
             <a:extLst xmlns:a="http://schemas.openxmlformats.org/drawingml/2006/main">
               <a:ext uri="{FF2B5EF4-FFF2-40B4-BE49-F238E27FC236}">
-                <a16:creationId xmlns:a16="http://schemas.microsoft.com/office/drawing/2014/main" id="{C0CB2C81-7EB3-48B4-8678-8A1B8F1B8582}"/>
+                <a16:creationId xmlns:a16="http://schemas.microsoft.com/office/drawing/2014/main" id="{29A92DA6-7344-4029-AF53-2BB827CECC0E}"/>
               </a:ext>
             </a:extLst>
           </p:cNvPr>
@@ -5148,7 +5148,7 @@
           <p:cNvPr id="18" name="">
             <a:extLst xmlns:a="http://schemas.openxmlformats.org/drawingml/2006/main">
               <a:ext uri="{FF2B5EF4-FFF2-40B4-BE49-F238E27FC236}">
-                <a16:creationId xmlns:a16="http://schemas.microsoft.com/office/drawing/2014/main" id="{1B142F21-3D1C-4F04-9184-FCAB8A80C3C8}"/>
+                <a16:creationId xmlns:a16="http://schemas.microsoft.com/office/drawing/2014/main" id="{C2C4BB38-432A-424F-9727-4B3AB5749F5D}"/>
               </a:ext>
             </a:extLst>
           </p:cNvPr>
@@ -5182,7 +5182,7 @@
           <p:cNvPr id="19" name="">
             <a:extLst xmlns:a="http://schemas.openxmlformats.org/drawingml/2006/main">
               <a:ext uri="{FF2B5EF4-FFF2-40B4-BE49-F238E27FC236}">
-                <a16:creationId xmlns:a16="http://schemas.microsoft.com/office/drawing/2014/main" id="{00EAD5D8-CB51-4711-9D35-6FBEAC7716E9}"/>
+                <a16:creationId xmlns:a16="http://schemas.microsoft.com/office/drawing/2014/main" id="{9F449555-218A-4A68-84BF-2DC46E3A97B6}"/>
               </a:ext>
             </a:extLst>
           </p:cNvPr>
@@ -5214,7 +5214,7 @@
           <p:cNvPr id="20" name="">
             <a:extLst xmlns:a="http://schemas.openxmlformats.org/drawingml/2006/main">
               <a:ext uri="{FF2B5EF4-FFF2-40B4-BE49-F238E27FC236}">
-                <a16:creationId xmlns:a16="http://schemas.microsoft.com/office/drawing/2014/main" id="{F14621C0-32B7-47D0-8C8C-6A3B6BDDDB78}"/>
+                <a16:creationId xmlns:a16="http://schemas.microsoft.com/office/drawing/2014/main" id="{09B3710A-5E79-4FEB-B557-234E966D2E53}"/>
               </a:ext>
             </a:extLst>
           </p:cNvPr>
@@ -5271,7 +5271,7 @@
           <p:cNvPr id="21" name="">
             <a:extLst xmlns:a="http://schemas.openxmlformats.org/drawingml/2006/main">
               <a:ext uri="{FF2B5EF4-FFF2-40B4-BE49-F238E27FC236}">
-                <a16:creationId xmlns:a16="http://schemas.microsoft.com/office/drawing/2014/main" id="{35CAA58A-ACE1-41E1-BA69-0D470C57F20C}"/>
+                <a16:creationId xmlns:a16="http://schemas.microsoft.com/office/drawing/2014/main" id="{7AE82D92-13C2-42B4-83B1-E4587158EAD4}"/>
               </a:ext>
             </a:extLst>
           </p:cNvPr>
@@ -5328,7 +5328,7 @@
           <p:cNvPr id="22" name="">
             <a:extLst xmlns:a="http://schemas.openxmlformats.org/drawingml/2006/main">
               <a:ext uri="{FF2B5EF4-FFF2-40B4-BE49-F238E27FC236}">
-                <a16:creationId xmlns:a16="http://schemas.microsoft.com/office/drawing/2014/main" id="{A6EB3988-7896-48F9-A6AA-FF8260940691}"/>
+                <a16:creationId xmlns:a16="http://schemas.microsoft.com/office/drawing/2014/main" id="{EB7E9163-9A14-46FA-913A-64EE37F1C236}"/>
               </a:ext>
             </a:extLst>
           </p:cNvPr>
@@ -5383,7 +5383,7 @@
     </p:spTree>
     <p:extLst>
       <p:ext uri="{BB962C8B-B14F-4D97-AF65-F5344CB8AC3E}">
-        <p14:creationId xmlns:p14="http://schemas.microsoft.com/office/powerpoint/2010/main" val="1969888194"/>
+        <p14:creationId xmlns:p14="http://schemas.microsoft.com/office/powerpoint/2010/main" val="1550326888"/>
       </p:ext>
     </p:extLst>
   </p:cSld>
@@ -5584,7 +5584,7 @@
           <p:cNvPr id="23" name="">
             <a:extLst xmlns:a="http://schemas.openxmlformats.org/drawingml/2006/main">
               <a:ext uri="{FF2B5EF4-FFF2-40B4-BE49-F238E27FC236}">
-                <a16:creationId xmlns:a16="http://schemas.microsoft.com/office/drawing/2014/main" id="{AD0311CE-5A04-4138-8811-1F5340B7871C}"/>
+                <a16:creationId xmlns:a16="http://schemas.microsoft.com/office/drawing/2014/main" id="{5CCEFB11-560C-411B-BDE8-1DDFB024A428}"/>
               </a:ext>
             </a:extLst>
           </p:cNvPr>
@@ -5616,7 +5616,7 @@
           <p:cNvPr id="2" name="">
             <a:extLst xmlns:a="http://schemas.openxmlformats.org/drawingml/2006/main">
               <a:ext uri="{FF2B5EF4-FFF2-40B4-BE49-F238E27FC236}">
-                <a16:creationId xmlns:a16="http://schemas.microsoft.com/office/drawing/2014/main" id="{E83B98D8-6108-4685-A677-088199031F2C}"/>
+                <a16:creationId xmlns:a16="http://schemas.microsoft.com/office/drawing/2014/main" id="{407F588E-BA2E-4D64-8D27-5BB4D40463B4}"/>
               </a:ext>
             </a:extLst>
           </p:cNvPr>
@@ -5673,7 +5673,7 @@
           <p:cNvPr id="3" name="">
             <a:extLst xmlns:a="http://schemas.openxmlformats.org/drawingml/2006/main">
               <a:ext uri="{FF2B5EF4-FFF2-40B4-BE49-F238E27FC236}">
-                <a16:creationId xmlns:a16="http://schemas.microsoft.com/office/drawing/2014/main" id="{290A0A22-64C8-4891-9148-8047C709FD59}"/>
+                <a16:creationId xmlns:a16="http://schemas.microsoft.com/office/drawing/2014/main" id="{9BA3969D-2233-42B4-932D-2642FDB74DDE}"/>
               </a:ext>
             </a:extLst>
           </p:cNvPr>
@@ -5705,7 +5705,7 @@
           <p:cNvPr id="4" name="">
             <a:extLst xmlns:a="http://schemas.openxmlformats.org/drawingml/2006/main">
               <a:ext uri="{FF2B5EF4-FFF2-40B4-BE49-F238E27FC236}">
-                <a16:creationId xmlns:a16="http://schemas.microsoft.com/office/drawing/2014/main" id="{9E3EDE7E-1D9C-4C2F-B977-21AC25AAC37C}"/>
+                <a16:creationId xmlns:a16="http://schemas.microsoft.com/office/drawing/2014/main" id="{D39BC320-A5A4-4687-93DE-5A6E7F24D242}"/>
               </a:ext>
             </a:extLst>
           </p:cNvPr>
@@ -5762,7 +5762,7 @@
           <p:cNvPr id="5" name="">
             <a:extLst xmlns:a="http://schemas.openxmlformats.org/drawingml/2006/main">
               <a:ext uri="{FF2B5EF4-FFF2-40B4-BE49-F238E27FC236}">
-                <a16:creationId xmlns:a16="http://schemas.microsoft.com/office/drawing/2014/main" id="{28AEEBDB-02DA-4F2C-A666-D04D75E8CC35}"/>
+                <a16:creationId xmlns:a16="http://schemas.microsoft.com/office/drawing/2014/main" id="{411AD61B-CA84-4FD2-AF5D-48EDF3B73462}"/>
               </a:ext>
             </a:extLst>
           </p:cNvPr>
@@ -5819,7 +5819,7 @@
           <p:cNvPr id="6" name="">
             <a:extLst xmlns:a="http://schemas.openxmlformats.org/drawingml/2006/main">
               <a:ext uri="{FF2B5EF4-FFF2-40B4-BE49-F238E27FC236}">
-                <a16:creationId xmlns:a16="http://schemas.microsoft.com/office/drawing/2014/main" id="{191299EE-9A65-45ED-BF7A-172A3727EAE0}"/>
+                <a16:creationId xmlns:a16="http://schemas.microsoft.com/office/drawing/2014/main" id="{3B91667C-73CC-4AC5-9782-EABDE372806E}"/>
               </a:ext>
             </a:extLst>
           </p:cNvPr>
@@ -5876,7 +5876,7 @@
           <p:cNvPr id="7" name="">
             <a:extLst xmlns:a="http://schemas.openxmlformats.org/drawingml/2006/main">
               <a:ext uri="{FF2B5EF4-FFF2-40B4-BE49-F238E27FC236}">
-                <a16:creationId xmlns:a16="http://schemas.microsoft.com/office/drawing/2014/main" id="{CAF9413C-ECAD-4CB6-B4B1-A7532B890D1D}"/>
+                <a16:creationId xmlns:a16="http://schemas.microsoft.com/office/drawing/2014/main" id="{2E11A570-ACC0-4CE3-AA98-AB6CF36A2726}"/>
               </a:ext>
             </a:extLst>
           </p:cNvPr>
@@ -5908,7 +5908,7 @@
           <p:cNvPr id="8" name="">
             <a:extLst xmlns:a="http://schemas.openxmlformats.org/drawingml/2006/main">
               <a:ext uri="{FF2B5EF4-FFF2-40B4-BE49-F238E27FC236}">
-                <a16:creationId xmlns:a16="http://schemas.microsoft.com/office/drawing/2014/main" id="{9C698DB5-F5A0-433B-B6A9-8F90A81192BB}"/>
+                <a16:creationId xmlns:a16="http://schemas.microsoft.com/office/drawing/2014/main" id="{39B39DF3-3D2D-4B28-8954-E44158D05C25}"/>
               </a:ext>
             </a:extLst>
           </p:cNvPr>
@@ -5965,7 +5965,7 @@
           <p:cNvPr id="9" name="">
             <a:extLst xmlns:a="http://schemas.openxmlformats.org/drawingml/2006/main">
               <a:ext uri="{FF2B5EF4-FFF2-40B4-BE49-F238E27FC236}">
-                <a16:creationId xmlns:a16="http://schemas.microsoft.com/office/drawing/2014/main" id="{3715EE20-697B-4B16-96E6-BB799F070863}"/>
+                <a16:creationId xmlns:a16="http://schemas.microsoft.com/office/drawing/2014/main" id="{B10B4C96-98F0-4E1C-ABC4-806A3A187495}"/>
               </a:ext>
             </a:extLst>
           </p:cNvPr>
@@ -6022,7 +6022,7 @@
           <p:cNvPr id="10" name="">
             <a:extLst xmlns:a="http://schemas.openxmlformats.org/drawingml/2006/main">
               <a:ext uri="{FF2B5EF4-FFF2-40B4-BE49-F238E27FC236}">
-                <a16:creationId xmlns:a16="http://schemas.microsoft.com/office/drawing/2014/main" id="{C6F2193C-77FB-425F-BEA5-6CC395DCC3B5}"/>
+                <a16:creationId xmlns:a16="http://schemas.microsoft.com/office/drawing/2014/main" id="{49A608DB-A326-4D00-BAE0-B1050FD70A0A}"/>
               </a:ext>
             </a:extLst>
           </p:cNvPr>
@@ -6056,7 +6056,7 @@
           <p:cNvPr id="11" name="">
             <a:extLst xmlns:a="http://schemas.openxmlformats.org/drawingml/2006/main">
               <a:ext uri="{FF2B5EF4-FFF2-40B4-BE49-F238E27FC236}">
-                <a16:creationId xmlns:a16="http://schemas.microsoft.com/office/drawing/2014/main" id="{70C812F7-D35E-4C10-B7A3-985CACAD10B9}"/>
+                <a16:creationId xmlns:a16="http://schemas.microsoft.com/office/drawing/2014/main" id="{CB5DC8B6-89C9-4421-B6AA-1A0191BE942B}"/>
               </a:ext>
             </a:extLst>
           </p:cNvPr>
@@ -6088,7 +6088,7 @@
           <p:cNvPr id="12" name="">
             <a:extLst xmlns:a="http://schemas.openxmlformats.org/drawingml/2006/main">
               <a:ext uri="{FF2B5EF4-FFF2-40B4-BE49-F238E27FC236}">
-                <a16:creationId xmlns:a16="http://schemas.microsoft.com/office/drawing/2014/main" id="{92B86C17-FA04-41F7-90CB-EBCEA14D2F30}"/>
+                <a16:creationId xmlns:a16="http://schemas.microsoft.com/office/drawing/2014/main" id="{EC9DAA85-7424-45DC-A860-B31A9128E76E}"/>
               </a:ext>
             </a:extLst>
           </p:cNvPr>
@@ -6145,7 +6145,7 @@
           <p:cNvPr id="13" name="">
             <a:extLst xmlns:a="http://schemas.openxmlformats.org/drawingml/2006/main">
               <a:ext uri="{FF2B5EF4-FFF2-40B4-BE49-F238E27FC236}">
-                <a16:creationId xmlns:a16="http://schemas.microsoft.com/office/drawing/2014/main" id="{5DCB659C-5B28-443B-B4CC-27D3EE045D05}"/>
+                <a16:creationId xmlns:a16="http://schemas.microsoft.com/office/drawing/2014/main" id="{A2BCD28C-658F-4CC8-B57F-0249CE8C43AE}"/>
               </a:ext>
             </a:extLst>
           </p:cNvPr>
@@ -6202,7 +6202,7 @@
           <p:cNvPr id="14" name="">
             <a:extLst xmlns:a="http://schemas.openxmlformats.org/drawingml/2006/main">
               <a:ext uri="{FF2B5EF4-FFF2-40B4-BE49-F238E27FC236}">
-                <a16:creationId xmlns:a16="http://schemas.microsoft.com/office/drawing/2014/main" id="{68114291-EDC5-4D79-92A5-617EBCC4B203}"/>
+                <a16:creationId xmlns:a16="http://schemas.microsoft.com/office/drawing/2014/main" id="{0C49B70F-D474-45D6-9E60-C6535ACD2395}"/>
               </a:ext>
             </a:extLst>
           </p:cNvPr>
@@ -6236,7 +6236,7 @@
           <p:cNvPr id="15" name="">
             <a:extLst xmlns:a="http://schemas.openxmlformats.org/drawingml/2006/main">
               <a:ext uri="{FF2B5EF4-FFF2-40B4-BE49-F238E27FC236}">
-                <a16:creationId xmlns:a16="http://schemas.microsoft.com/office/drawing/2014/main" id="{28C3DD3E-630A-4629-88D9-3AFB1AB098B0}"/>
+                <a16:creationId xmlns:a16="http://schemas.microsoft.com/office/drawing/2014/main" id="{908ECC46-BA5C-4089-9B53-7CFB24F96DC6}"/>
               </a:ext>
             </a:extLst>
           </p:cNvPr>
@@ -6268,7 +6268,7 @@
           <p:cNvPr id="16" name="">
             <a:extLst xmlns:a="http://schemas.openxmlformats.org/drawingml/2006/main">
               <a:ext uri="{FF2B5EF4-FFF2-40B4-BE49-F238E27FC236}">
-                <a16:creationId xmlns:a16="http://schemas.microsoft.com/office/drawing/2014/main" id="{B1F21D54-38ED-4806-9009-8BF4EC4616F0}"/>
+                <a16:creationId xmlns:a16="http://schemas.microsoft.com/office/drawing/2014/main" id="{C38B0B1A-224D-42A6-A2B8-542DF9CCC6D6}"/>
               </a:ext>
             </a:extLst>
           </p:cNvPr>
@@ -6325,7 +6325,7 @@
           <p:cNvPr id="17" name="">
             <a:extLst xmlns:a="http://schemas.openxmlformats.org/drawingml/2006/main">
               <a:ext uri="{FF2B5EF4-FFF2-40B4-BE49-F238E27FC236}">
-                <a16:creationId xmlns:a16="http://schemas.microsoft.com/office/drawing/2014/main" id="{9F178191-A6E0-4192-AC02-65ED9912E7EA}"/>
+                <a16:creationId xmlns:a16="http://schemas.microsoft.com/office/drawing/2014/main" id="{68070A8D-4014-4DB2-82E2-BE1BD44374EE}"/>
               </a:ext>
             </a:extLst>
           </p:cNvPr>
@@ -6382,7 +6382,7 @@
           <p:cNvPr id="18" name="">
             <a:extLst xmlns:a="http://schemas.openxmlformats.org/drawingml/2006/main">
               <a:ext uri="{FF2B5EF4-FFF2-40B4-BE49-F238E27FC236}">
-                <a16:creationId xmlns:a16="http://schemas.microsoft.com/office/drawing/2014/main" id="{D51F238E-355A-4871-BE1F-3C98E864B5B7}"/>
+                <a16:creationId xmlns:a16="http://schemas.microsoft.com/office/drawing/2014/main" id="{9086A2B4-DC82-4A0F-89A1-ACD5521A2894}"/>
               </a:ext>
             </a:extLst>
           </p:cNvPr>
@@ -6416,7 +6416,7 @@
           <p:cNvPr id="19" name="">
             <a:extLst xmlns:a="http://schemas.openxmlformats.org/drawingml/2006/main">
               <a:ext uri="{FF2B5EF4-FFF2-40B4-BE49-F238E27FC236}">
-                <a16:creationId xmlns:a16="http://schemas.microsoft.com/office/drawing/2014/main" id="{F45BF05F-01C8-4D20-BC0E-3892DAB93C00}"/>
+                <a16:creationId xmlns:a16="http://schemas.microsoft.com/office/drawing/2014/main" id="{D26B0518-4B11-465A-B8FB-17A0A04A5F79}"/>
               </a:ext>
             </a:extLst>
           </p:cNvPr>
@@ -6448,7 +6448,7 @@
           <p:cNvPr id="20" name="">
             <a:extLst xmlns:a="http://schemas.openxmlformats.org/drawingml/2006/main">
               <a:ext uri="{FF2B5EF4-FFF2-40B4-BE49-F238E27FC236}">
-                <a16:creationId xmlns:a16="http://schemas.microsoft.com/office/drawing/2014/main" id="{D39741C8-2102-437E-8274-2EFE8DFBB70C}"/>
+                <a16:creationId xmlns:a16="http://schemas.microsoft.com/office/drawing/2014/main" id="{1E19D0DC-869B-4F37-A47F-CC818B2F0984}"/>
               </a:ext>
             </a:extLst>
           </p:cNvPr>
@@ -6505,7 +6505,7 @@
           <p:cNvPr id="21" name="">
             <a:extLst xmlns:a="http://schemas.openxmlformats.org/drawingml/2006/main">
               <a:ext uri="{FF2B5EF4-FFF2-40B4-BE49-F238E27FC236}">
-                <a16:creationId xmlns:a16="http://schemas.microsoft.com/office/drawing/2014/main" id="{EF590F34-0DCD-4563-99F8-1B25E4D84F12}"/>
+                <a16:creationId xmlns:a16="http://schemas.microsoft.com/office/drawing/2014/main" id="{A5C85FCF-351E-443C-BA3F-DAE535EA91B3}"/>
               </a:ext>
             </a:extLst>
           </p:cNvPr>
@@ -6562,7 +6562,7 @@
           <p:cNvPr id="22" name="">
             <a:extLst xmlns:a="http://schemas.openxmlformats.org/drawingml/2006/main">
               <a:ext uri="{FF2B5EF4-FFF2-40B4-BE49-F238E27FC236}">
-                <a16:creationId xmlns:a16="http://schemas.microsoft.com/office/drawing/2014/main" id="{A6B61AF7-A3A9-48B2-94FF-09F94562502C}"/>
+                <a16:creationId xmlns:a16="http://schemas.microsoft.com/office/drawing/2014/main" id="{49502D77-A7F3-4754-A055-0263CB776D53}"/>
               </a:ext>
             </a:extLst>
           </p:cNvPr>
@@ -6617,7 +6617,7 @@
     </p:spTree>
     <p:extLst>
       <p:ext uri="{BB962C8B-B14F-4D97-AF65-F5344CB8AC3E}">
-        <p14:creationId xmlns:p14="http://schemas.microsoft.com/office/powerpoint/2010/main" val="95064771"/>
+        <p14:creationId xmlns:p14="http://schemas.microsoft.com/office/powerpoint/2010/main" val="1299902692"/>
       </p:ext>
     </p:extLst>
   </p:cSld>
@@ -6818,7 +6818,7 @@
           <p:cNvPr id="16" name="">
             <a:extLst xmlns:a="http://schemas.openxmlformats.org/drawingml/2006/main">
               <a:ext uri="{FF2B5EF4-FFF2-40B4-BE49-F238E27FC236}">
-                <a16:creationId xmlns:a16="http://schemas.microsoft.com/office/drawing/2014/main" id="{37DBA7EF-ACD4-44D8-A3C0-8531B9EE797B}"/>
+                <a16:creationId xmlns:a16="http://schemas.microsoft.com/office/drawing/2014/main" id="{99259149-D07E-4BCA-80BC-0F43C542367B}"/>
               </a:ext>
             </a:extLst>
           </p:cNvPr>
@@ -6850,7 +6850,7 @@
           <p:cNvPr id="2" name="">
             <a:extLst xmlns:a="http://schemas.openxmlformats.org/drawingml/2006/main">
               <a:ext uri="{FF2B5EF4-FFF2-40B4-BE49-F238E27FC236}">
-                <a16:creationId xmlns:a16="http://schemas.microsoft.com/office/drawing/2014/main" id="{ECF6A141-F16E-4279-84D9-228C74B26CF4}"/>
+                <a16:creationId xmlns:a16="http://schemas.microsoft.com/office/drawing/2014/main" id="{7158A04C-DBE7-4AAE-8325-DDAA610FBCB3}"/>
               </a:ext>
             </a:extLst>
           </p:cNvPr>
@@ -6907,7 +6907,7 @@
           <p:cNvPr id="3" name="">
             <a:extLst xmlns:a="http://schemas.openxmlformats.org/drawingml/2006/main">
               <a:ext uri="{FF2B5EF4-FFF2-40B4-BE49-F238E27FC236}">
-                <a16:creationId xmlns:a16="http://schemas.microsoft.com/office/drawing/2014/main" id="{82B8FF93-ADE7-4153-AE2A-6E89B6472ED3}"/>
+                <a16:creationId xmlns:a16="http://schemas.microsoft.com/office/drawing/2014/main" id="{93253C72-2FC5-4978-89C6-D64CF3034EDD}"/>
               </a:ext>
             </a:extLst>
           </p:cNvPr>
@@ -6939,7 +6939,7 @@
           <p:cNvPr id="4" name="">
             <a:extLst xmlns:a="http://schemas.openxmlformats.org/drawingml/2006/main">
               <a:ext uri="{FF2B5EF4-FFF2-40B4-BE49-F238E27FC236}">
-                <a16:creationId xmlns:a16="http://schemas.microsoft.com/office/drawing/2014/main" id="{31F472C0-6AED-4E20-8381-9CE874E9CABE}"/>
+                <a16:creationId xmlns:a16="http://schemas.microsoft.com/office/drawing/2014/main" id="{B4413499-8020-4A1C-AC63-5A07FA679861}"/>
               </a:ext>
             </a:extLst>
           </p:cNvPr>
@@ -6996,7 +6996,7 @@
           <p:cNvPr id="5" name="">
             <a:extLst xmlns:a="http://schemas.openxmlformats.org/drawingml/2006/main">
               <a:ext uri="{FF2B5EF4-FFF2-40B4-BE49-F238E27FC236}">
-                <a16:creationId xmlns:a16="http://schemas.microsoft.com/office/drawing/2014/main" id="{D090C5B9-D1D4-4762-9DFA-57E20D3FBC15}"/>
+                <a16:creationId xmlns:a16="http://schemas.microsoft.com/office/drawing/2014/main" id="{ADABD9E1-DD37-46BA-872B-A59E452D489D}"/>
               </a:ext>
             </a:extLst>
           </p:cNvPr>
@@ -7053,7 +7053,7 @@
           <p:cNvPr id="6" name="">
             <a:extLst xmlns:a="http://schemas.openxmlformats.org/drawingml/2006/main">
               <a:ext uri="{FF2B5EF4-FFF2-40B4-BE49-F238E27FC236}">
-                <a16:creationId xmlns:a16="http://schemas.microsoft.com/office/drawing/2014/main" id="{4F69C511-A6F8-4C03-AACD-C08363EE51CC}"/>
+                <a16:creationId xmlns:a16="http://schemas.microsoft.com/office/drawing/2014/main" id="{979A6752-B8CF-4D46-A102-DE27F0510769}"/>
               </a:ext>
             </a:extLst>
           </p:cNvPr>
@@ -7110,7 +7110,7 @@
           <p:cNvPr id="7" name="">
             <a:extLst xmlns:a="http://schemas.openxmlformats.org/drawingml/2006/main">
               <a:ext uri="{FF2B5EF4-FFF2-40B4-BE49-F238E27FC236}">
-                <a16:creationId xmlns:a16="http://schemas.microsoft.com/office/drawing/2014/main" id="{15BBAD97-3233-4B90-A46A-20C8667BFA15}"/>
+                <a16:creationId xmlns:a16="http://schemas.microsoft.com/office/drawing/2014/main" id="{58EFA1E8-0973-4AE7-8716-6BCA7C7E7EA4}"/>
               </a:ext>
             </a:extLst>
           </p:cNvPr>
@@ -7142,7 +7142,7 @@
           <p:cNvPr id="8" name="">
             <a:extLst xmlns:a="http://schemas.openxmlformats.org/drawingml/2006/main">
               <a:ext uri="{FF2B5EF4-FFF2-40B4-BE49-F238E27FC236}">
-                <a16:creationId xmlns:a16="http://schemas.microsoft.com/office/drawing/2014/main" id="{91C0A522-BDC4-488A-A406-90DF901BC112}"/>
+                <a16:creationId xmlns:a16="http://schemas.microsoft.com/office/drawing/2014/main" id="{591F3E24-9678-465B-828E-5F96C058ABFD}"/>
               </a:ext>
             </a:extLst>
           </p:cNvPr>
@@ -7199,7 +7199,7 @@
           <p:cNvPr id="9" name="">
             <a:extLst xmlns:a="http://schemas.openxmlformats.org/drawingml/2006/main">
               <a:ext uri="{FF2B5EF4-FFF2-40B4-BE49-F238E27FC236}">
-                <a16:creationId xmlns:a16="http://schemas.microsoft.com/office/drawing/2014/main" id="{BFD8128A-40F7-416D-9282-81320644F110}"/>
+                <a16:creationId xmlns:a16="http://schemas.microsoft.com/office/drawing/2014/main" id="{C2A084F4-0E71-4C32-BDC8-0B9CE787856E}"/>
               </a:ext>
             </a:extLst>
           </p:cNvPr>
@@ -7256,7 +7256,7 @@
           <p:cNvPr id="10" name="">
             <a:extLst xmlns:a="http://schemas.openxmlformats.org/drawingml/2006/main">
               <a:ext uri="{FF2B5EF4-FFF2-40B4-BE49-F238E27FC236}">
-                <a16:creationId xmlns:a16="http://schemas.microsoft.com/office/drawing/2014/main" id="{7850E774-CF21-45B1-9214-956708606F5D}"/>
+                <a16:creationId xmlns:a16="http://schemas.microsoft.com/office/drawing/2014/main" id="{72CE26D5-B200-4B7C-BBB7-367AD6DCB1A7}"/>
               </a:ext>
             </a:extLst>
           </p:cNvPr>
@@ -7313,7 +7313,7 @@
           <p:cNvPr id="11" name="">
             <a:extLst xmlns:a="http://schemas.openxmlformats.org/drawingml/2006/main">
               <a:ext uri="{FF2B5EF4-FFF2-40B4-BE49-F238E27FC236}">
-                <a16:creationId xmlns:a16="http://schemas.microsoft.com/office/drawing/2014/main" id="{2ED17D40-A500-4160-92C8-4EF05CD3E3C1}"/>
+                <a16:creationId xmlns:a16="http://schemas.microsoft.com/office/drawing/2014/main" id="{D409CCF9-590D-444E-8DCB-D58A07851725}"/>
               </a:ext>
             </a:extLst>
           </p:cNvPr>
@@ -7345,7 +7345,7 @@
           <p:cNvPr id="12" name="">
             <a:extLst xmlns:a="http://schemas.openxmlformats.org/drawingml/2006/main">
               <a:ext uri="{FF2B5EF4-FFF2-40B4-BE49-F238E27FC236}">
-                <a16:creationId xmlns:a16="http://schemas.microsoft.com/office/drawing/2014/main" id="{A6B312B4-D836-49C4-975E-FD97CDD6D861}"/>
+                <a16:creationId xmlns:a16="http://schemas.microsoft.com/office/drawing/2014/main" id="{3DF52F32-CEE2-4273-BD54-323A5C77F228}"/>
               </a:ext>
             </a:extLst>
           </p:cNvPr>
@@ -7402,7 +7402,7 @@
           <p:cNvPr id="13" name="">
             <a:extLst xmlns:a="http://schemas.openxmlformats.org/drawingml/2006/main">
               <a:ext uri="{FF2B5EF4-FFF2-40B4-BE49-F238E27FC236}">
-                <a16:creationId xmlns:a16="http://schemas.microsoft.com/office/drawing/2014/main" id="{0131B5C2-7C3C-40F1-AAA6-C80119417E1E}"/>
+                <a16:creationId xmlns:a16="http://schemas.microsoft.com/office/drawing/2014/main" id="{9516215F-6DC0-4B23-8963-34698AE02E8C}"/>
               </a:ext>
             </a:extLst>
           </p:cNvPr>
@@ -7459,7 +7459,7 @@
           <p:cNvPr id="14" name="">
             <a:extLst xmlns:a="http://schemas.openxmlformats.org/drawingml/2006/main">
               <a:ext uri="{FF2B5EF4-FFF2-40B4-BE49-F238E27FC236}">
-                <a16:creationId xmlns:a16="http://schemas.microsoft.com/office/drawing/2014/main" id="{55EEC77A-3ED6-49AF-9082-6B8840552E6E}"/>
+                <a16:creationId xmlns:a16="http://schemas.microsoft.com/office/drawing/2014/main" id="{B94E8209-BBE2-458B-A3E2-CEE851F02BAB}"/>
               </a:ext>
             </a:extLst>
           </p:cNvPr>
@@ -7516,7 +7516,7 @@
           <p:cNvPr id="15" name="">
             <a:extLst xmlns:a="http://schemas.openxmlformats.org/drawingml/2006/main">
               <a:ext uri="{FF2B5EF4-FFF2-40B4-BE49-F238E27FC236}">
-                <a16:creationId xmlns:a16="http://schemas.microsoft.com/office/drawing/2014/main" id="{54B31A82-6C58-4562-BF6F-01526683E81F}"/>
+                <a16:creationId xmlns:a16="http://schemas.microsoft.com/office/drawing/2014/main" id="{DB46DD56-F5F3-4625-B228-54AC9BA87F3C}"/>
               </a:ext>
             </a:extLst>
           </p:cNvPr>
@@ -7571,7 +7571,7 @@
     </p:spTree>
     <p:extLst>
       <p:ext uri="{BB962C8B-B14F-4D97-AF65-F5344CB8AC3E}">
-        <p14:creationId xmlns:p14="http://schemas.microsoft.com/office/powerpoint/2010/main" val="1407562715"/>
+        <p14:creationId xmlns:p14="http://schemas.microsoft.com/office/powerpoint/2010/main" val="530180191"/>
       </p:ext>
     </p:extLst>
   </p:cSld>
@@ -7769,10 +7769,10 @@
       </p:grpSpPr>
       <p:sp>
         <p:nvSpPr>
-          <p:cNvPr id="23" name="">
-            <a:extLst xmlns:a="http://schemas.openxmlformats.org/drawingml/2006/main">
-              <a:ext uri="{FF2B5EF4-FFF2-40B4-BE49-F238E27FC236}">
-                <a16:creationId xmlns:a16="http://schemas.microsoft.com/office/drawing/2014/main" id="{B563FD42-7ACB-4676-A879-65A952B4C376}"/>
+          <p:cNvPr id="26" name="">
+            <a:extLst xmlns:a="http://schemas.openxmlformats.org/drawingml/2006/main">
+              <a:ext uri="{FF2B5EF4-FFF2-40B4-BE49-F238E27FC236}">
+                <a16:creationId xmlns:a16="http://schemas.microsoft.com/office/drawing/2014/main" id="{3DC094F9-CB52-41BD-AD37-D3FDE41F9953}"/>
               </a:ext>
             </a:extLst>
           </p:cNvPr>
@@ -7804,7 +7804,7 @@
           <p:cNvPr id="2" name="">
             <a:extLst xmlns:a="http://schemas.openxmlformats.org/drawingml/2006/main">
               <a:ext uri="{FF2B5EF4-FFF2-40B4-BE49-F238E27FC236}">
-                <a16:creationId xmlns:a16="http://schemas.microsoft.com/office/drawing/2014/main" id="{7D6637B4-1C9E-4B81-ADBE-E11C3E67C669}"/>
+                <a16:creationId xmlns:a16="http://schemas.microsoft.com/office/drawing/2014/main" id="{6E70AD75-FDA7-4254-85F0-5AB91660DD4D}"/>
               </a:ext>
             </a:extLst>
           </p:cNvPr>
@@ -7861,7 +7861,7 @@
           <p:cNvPr id="3" name="">
             <a:extLst xmlns:a="http://schemas.openxmlformats.org/drawingml/2006/main">
               <a:ext uri="{FF2B5EF4-FFF2-40B4-BE49-F238E27FC236}">
-                <a16:creationId xmlns:a16="http://schemas.microsoft.com/office/drawing/2014/main" id="{8E8E9C76-30CB-454C-9F2B-ED03D625F22E}"/>
+                <a16:creationId xmlns:a16="http://schemas.microsoft.com/office/drawing/2014/main" id="{594341DB-5848-45B1-B148-AE911F1005D6}"/>
               </a:ext>
             </a:extLst>
           </p:cNvPr>
@@ -7893,7 +7893,7 @@
           <p:cNvPr id="4" name="">
             <a:extLst xmlns:a="http://schemas.openxmlformats.org/drawingml/2006/main">
               <a:ext uri="{FF2B5EF4-FFF2-40B4-BE49-F238E27FC236}">
-                <a16:creationId xmlns:a16="http://schemas.microsoft.com/office/drawing/2014/main" id="{7F8A3817-0C2C-4279-932D-3E2A5169D06D}"/>
+                <a16:creationId xmlns:a16="http://schemas.microsoft.com/office/drawing/2014/main" id="{8F1252AD-B69E-48A9-AE4C-C1BAA0B7F27B}"/>
               </a:ext>
             </a:extLst>
           </p:cNvPr>
@@ -7950,7 +7950,7 @@
           <p:cNvPr id="5" name="">
             <a:extLst xmlns:a="http://schemas.openxmlformats.org/drawingml/2006/main">
               <a:ext uri="{FF2B5EF4-FFF2-40B4-BE49-F238E27FC236}">
-                <a16:creationId xmlns:a16="http://schemas.microsoft.com/office/drawing/2014/main" id="{E1A69267-EA08-4EB4-BF4B-B49CC0BDD6F1}"/>
+                <a16:creationId xmlns:a16="http://schemas.microsoft.com/office/drawing/2014/main" id="{D7B538A2-1FAC-470E-8FF8-75A68CDA00F8}"/>
               </a:ext>
             </a:extLst>
           </p:cNvPr>
@@ -8007,7 +8007,7 @@
           <p:cNvPr id="6" name="">
             <a:extLst xmlns:a="http://schemas.openxmlformats.org/drawingml/2006/main">
               <a:ext uri="{FF2B5EF4-FFF2-40B4-BE49-F238E27FC236}">
-                <a16:creationId xmlns:a16="http://schemas.microsoft.com/office/drawing/2014/main" id="{BF85081E-0F20-402C-9959-5FF7092D0DAA}"/>
+                <a16:creationId xmlns:a16="http://schemas.microsoft.com/office/drawing/2014/main" id="{2EA56CFB-0D82-4871-894F-14C118C77D27}"/>
               </a:ext>
             </a:extLst>
           </p:cNvPr>
@@ -8064,7 +8064,7 @@
           <p:cNvPr id="7" name="">
             <a:extLst xmlns:a="http://schemas.openxmlformats.org/drawingml/2006/main">
               <a:ext uri="{FF2B5EF4-FFF2-40B4-BE49-F238E27FC236}">
-                <a16:creationId xmlns:a16="http://schemas.microsoft.com/office/drawing/2014/main" id="{0E1624F5-6C15-4D71-8B7D-929E428C6E7F}"/>
+                <a16:creationId xmlns:a16="http://schemas.microsoft.com/office/drawing/2014/main" id="{7EE583FF-FBC8-4A60-925E-8BF870523126}"/>
               </a:ext>
             </a:extLst>
           </p:cNvPr>
@@ -8096,7 +8096,7 @@
           <p:cNvPr id="8" name="">
             <a:extLst xmlns:a="http://schemas.openxmlformats.org/drawingml/2006/main">
               <a:ext uri="{FF2B5EF4-FFF2-40B4-BE49-F238E27FC236}">
-                <a16:creationId xmlns:a16="http://schemas.microsoft.com/office/drawing/2014/main" id="{FFAF9F42-D5E7-4369-BA25-9523C95981F1}"/>
+                <a16:creationId xmlns:a16="http://schemas.microsoft.com/office/drawing/2014/main" id="{08D6E40D-17B9-45E8-8DC1-808130FA1D83}"/>
               </a:ext>
             </a:extLst>
           </p:cNvPr>
@@ -8153,7 +8153,7 @@
           <p:cNvPr id="9" name="">
             <a:extLst xmlns:a="http://schemas.openxmlformats.org/drawingml/2006/main">
               <a:ext uri="{FF2B5EF4-FFF2-40B4-BE49-F238E27FC236}">
-                <a16:creationId xmlns:a16="http://schemas.microsoft.com/office/drawing/2014/main" id="{B8EB8F8C-F7FC-4D6D-BF2B-0D5BB3433A2B}"/>
+                <a16:creationId xmlns:a16="http://schemas.microsoft.com/office/drawing/2014/main" id="{3B7B5F08-F0B6-4111-B5D1-782BAB26B5B3}"/>
               </a:ext>
             </a:extLst>
           </p:cNvPr>
@@ -8210,19 +8210,19 @@
           <p:cNvPr id="10" name="">
             <a:extLst xmlns:a="http://schemas.openxmlformats.org/drawingml/2006/main">
               <a:ext uri="{FF2B5EF4-FFF2-40B4-BE49-F238E27FC236}">
-                <a16:creationId xmlns:a16="http://schemas.microsoft.com/office/drawing/2014/main" id="{3D12606C-BC7C-4DCB-AEA7-88D5A54F9950}"/>
-              </a:ext>
-            </a:extLst>
-          </p:cNvPr>
-          <p:cNvSpPr>
-            <a:spLocks xmlns:a="http://schemas.openxmlformats.org/drawingml/2006/main" noGrp="1"/>
-          </p:cNvSpPr>
-          <p:nvPr/>
-        </p:nvSpPr>
-        <p:spPr>
-          <a:xfrm xmlns:a="http://schemas.openxmlformats.org/drawingml/2006/main">
-            <a:off x="914400" y="1257300"/>
-            <a:ext cx="10363200" cy="781050"/>
+                <a16:creationId xmlns:a16="http://schemas.microsoft.com/office/drawing/2014/main" id="{47A3F87D-9F3F-44C7-AB1D-A2589A3BBE4B}"/>
+              </a:ext>
+            </a:extLst>
+          </p:cNvPr>
+          <p:cNvSpPr>
+            <a:spLocks xmlns:a="http://schemas.openxmlformats.org/drawingml/2006/main" noGrp="1"/>
+          </p:cNvSpPr>
+          <p:nvPr/>
+        </p:nvSpPr>
+        <p:spPr>
+          <a:xfrm xmlns:a="http://schemas.openxmlformats.org/drawingml/2006/main">
+            <a:off x="857250" y="1219200"/>
+            <a:ext cx="10477500" cy="742950"/>
           </a:xfrm>
           <a:prstGeom xmlns:a="http://schemas.openxmlformats.org/drawingml/2006/main" prst="rect">
             <a:avLst/>
@@ -8239,7 +8239,7 @@
           <a:lstStyle xmlns:a="http://schemas.openxmlformats.org/drawingml/2006/main"/>
           <a:p xmlns:a="http://schemas.openxmlformats.org/drawingml/2006/main">
             <a:pPr algn="ctr">
-              <a:defRPr sz="2175" b="1">
+              <a:defRPr sz="2100" b="1">
                 <a:solidFill>
                   <a:srgbClr val="17253A"/>
                 </a:solidFill>
@@ -8249,7 +8249,7 @@
               </a:defRPr>
             </a:pPr>
             <a:r>
-              <a:rPr sz="2175" b="1">
+              <a:rPr sz="2100" b="1">
                 <a:solidFill>
                   <a:srgbClr val="17253A"/>
                 </a:solidFill>
@@ -8267,28 +8267,30 @@
           <p:cNvPr id="11" name="">
             <a:extLst xmlns:a="http://schemas.openxmlformats.org/drawingml/2006/main">
               <a:ext uri="{FF2B5EF4-FFF2-40B4-BE49-F238E27FC236}">
-                <a16:creationId xmlns:a16="http://schemas.microsoft.com/office/drawing/2014/main" id="{0004A697-F0C8-4EC6-BFA5-CA8800ACA9B8}"/>
-              </a:ext>
-            </a:extLst>
-          </p:cNvPr>
-          <p:cNvSpPr>
-            <a:spLocks xmlns:a="http://schemas.openxmlformats.org/drawingml/2006/main" noGrp="1"/>
-          </p:cNvSpPr>
-          <p:nvPr/>
-        </p:nvSpPr>
-        <p:spPr>
-          <a:xfrm xmlns:a="http://schemas.openxmlformats.org/drawingml/2006/main">
-            <a:off x="1000125" y="2247900"/>
-            <a:ext cx="476250" cy="476250"/>
-          </a:xfrm>
-          <a:prstGeom xmlns:a="http://schemas.openxmlformats.org/drawingml/2006/main" prst="ellipse">
+                <a16:creationId xmlns:a16="http://schemas.microsoft.com/office/drawing/2014/main" id="{2BEC04E5-C1D1-4F42-9BD5-88065CE96D6A}"/>
+              </a:ext>
+            </a:extLst>
+          </p:cNvPr>
+          <p:cNvSpPr>
+            <a:spLocks xmlns:a="http://schemas.openxmlformats.org/drawingml/2006/main" noGrp="1"/>
+          </p:cNvSpPr>
+          <p:nvPr/>
+        </p:nvSpPr>
+        <p:spPr>
+          <a:xfrm xmlns:a="http://schemas.openxmlformats.org/drawingml/2006/main">
+            <a:off x="971550" y="2124075"/>
+            <a:ext cx="38100" cy="3524250"/>
+          </a:xfrm>
+          <a:prstGeom xmlns:a="http://schemas.openxmlformats.org/drawingml/2006/main" prst="rect">
             <a:avLst/>
           </a:prstGeom>
           <a:solidFill xmlns:a="http://schemas.openxmlformats.org/drawingml/2006/main">
-            <a:srgbClr val="18324A"/>
+            <a:srgbClr val="2C6E73"/>
           </a:solidFill>
           <a:ln xmlns:a="http://schemas.openxmlformats.org/drawingml/2006/main" w="0">
-            <a:noFill/>
+            <a:solidFill>
+              <a:srgbClr val="2C6E73"/>
+            </a:solidFill>
           </a:ln>
         </p:spPr>
       </p:sp>
@@ -8297,19 +8299,19 @@
           <p:cNvPr id="12" name="">
             <a:extLst xmlns:a="http://schemas.openxmlformats.org/drawingml/2006/main">
               <a:ext uri="{FF2B5EF4-FFF2-40B4-BE49-F238E27FC236}">
-                <a16:creationId xmlns:a16="http://schemas.microsoft.com/office/drawing/2014/main" id="{32704D77-94E5-45A1-B56D-1FAC9EC4AF05}"/>
-              </a:ext>
-            </a:extLst>
-          </p:cNvPr>
-          <p:cNvSpPr>
-            <a:spLocks xmlns:a="http://schemas.openxmlformats.org/drawingml/2006/main" noGrp="1"/>
-          </p:cNvSpPr>
-          <p:nvPr/>
-        </p:nvSpPr>
-        <p:spPr>
-          <a:xfrm xmlns:a="http://schemas.openxmlformats.org/drawingml/2006/main">
-            <a:off x="1000125" y="2276475"/>
-            <a:ext cx="476250" cy="419100"/>
+                <a16:creationId xmlns:a16="http://schemas.microsoft.com/office/drawing/2014/main" id="{A41F66FE-AFB0-42BB-804D-1826DCA9FA47}"/>
+              </a:ext>
+            </a:extLst>
+          </p:cNvPr>
+          <p:cNvSpPr>
+            <a:spLocks xmlns:a="http://schemas.openxmlformats.org/drawingml/2006/main" noGrp="1"/>
+          </p:cNvSpPr>
+          <p:nvPr/>
+        </p:nvSpPr>
+        <p:spPr>
+          <a:xfrm xmlns:a="http://schemas.openxmlformats.org/drawingml/2006/main">
+            <a:off x="1162050" y="2200275"/>
+            <a:ext cx="400050" cy="400050"/>
           </a:xfrm>
           <a:prstGeom xmlns:a="http://schemas.openxmlformats.org/drawingml/2006/main" prst="rect">
             <a:avLst/>
@@ -8326,9 +8328,9 @@
           <a:lstStyle xmlns:a="http://schemas.openxmlformats.org/drawingml/2006/main"/>
           <a:p xmlns:a="http://schemas.openxmlformats.org/drawingml/2006/main">
             <a:pPr algn="ctr">
-              <a:defRPr sz="1350" b="1">
-                <a:solidFill>
-                  <a:srgbClr val="FFFFFF"/>
+              <a:defRPr sz="1125" b="1">
+                <a:solidFill>
+                  <a:srgbClr val="2C6E73"/>
                 </a:solidFill>
                 <a:latin typeface="Arial"/>
                 <a:ea typeface="Arial"/>
@@ -8336,9 +8338,9 @@
               </a:defRPr>
             </a:pPr>
             <a:r>
-              <a:rPr sz="1350" b="1">
-                <a:solidFill>
-                  <a:srgbClr val="FFFFFF"/>
+              <a:rPr sz="1125" b="1">
+                <a:solidFill>
+                  <a:srgbClr val="2C6E73"/>
                 </a:solidFill>
                 <a:latin typeface="Arial"/>
                 <a:ea typeface="Arial"/>
@@ -8354,19 +8356,19 @@
           <p:cNvPr id="13" name="">
             <a:extLst xmlns:a="http://schemas.openxmlformats.org/drawingml/2006/main">
               <a:ext uri="{FF2B5EF4-FFF2-40B4-BE49-F238E27FC236}">
-                <a16:creationId xmlns:a16="http://schemas.microsoft.com/office/drawing/2014/main" id="{78539C02-4C16-40F8-8E0F-CBB0E106D50D}"/>
-              </a:ext>
-            </a:extLst>
-          </p:cNvPr>
-          <p:cNvSpPr>
-            <a:spLocks xmlns:a="http://schemas.openxmlformats.org/drawingml/2006/main" noGrp="1"/>
-          </p:cNvSpPr>
-          <p:nvPr/>
-        </p:nvSpPr>
-        <p:spPr>
-          <a:xfrm xmlns:a="http://schemas.openxmlformats.org/drawingml/2006/main">
-            <a:off x="1714500" y="2181225"/>
-            <a:ext cx="9429750" cy="609600"/>
+                <a16:creationId xmlns:a16="http://schemas.microsoft.com/office/drawing/2014/main" id="{8BB0F4E0-E4B4-4F7F-A58B-98CEA5F799C5}"/>
+              </a:ext>
+            </a:extLst>
+          </p:cNvPr>
+          <p:cNvSpPr>
+            <a:spLocks xmlns:a="http://schemas.openxmlformats.org/drawingml/2006/main" noGrp="1"/>
+          </p:cNvSpPr>
+          <p:nvPr/>
+        </p:nvSpPr>
+        <p:spPr>
+          <a:xfrm xmlns:a="http://schemas.openxmlformats.org/drawingml/2006/main">
+            <a:off x="1714500" y="2114550"/>
+            <a:ext cx="9525000" cy="638175"/>
           </a:xfrm>
           <a:prstGeom xmlns:a="http://schemas.openxmlformats.org/drawingml/2006/main" prst="rect">
             <a:avLst/>
@@ -8383,7 +8385,7 @@
           <a:lstStyle xmlns:a="http://schemas.openxmlformats.org/drawingml/2006/main"/>
           <a:p xmlns:a="http://schemas.openxmlformats.org/drawingml/2006/main">
             <a:pPr algn="l">
-              <a:defRPr sz="1500" b="0">
+              <a:defRPr sz="1575" b="0">
                 <a:solidFill>
                   <a:srgbClr val="17253A"/>
                 </a:solidFill>
@@ -8393,7 +8395,7 @@
               </a:defRPr>
             </a:pPr>
             <a:r>
-              <a:rPr sz="1500" b="0">
+              <a:rPr sz="1575" b="0">
                 <a:solidFill>
                   <a:srgbClr val="17253A"/>
                 </a:solidFill>
@@ -8401,7 +8403,7 @@
                 <a:ea typeface="Arial"/>
                 <a:cs typeface="Arial"/>
               </a:rPr>
-              <a:t>Identify the structure: Find a common denominator before combining fractions.</a:t>
+              <a:t>3 1/2 - 1 3/4 + 2/3</a:t>
             </a:r>
           </a:p>
         </p:txBody>
@@ -8411,28 +8413,30 @@
           <p:cNvPr id="14" name="">
             <a:extLst xmlns:a="http://schemas.openxmlformats.org/drawingml/2006/main">
               <a:ext uri="{FF2B5EF4-FFF2-40B4-BE49-F238E27FC236}">
-                <a16:creationId xmlns:a16="http://schemas.microsoft.com/office/drawing/2014/main" id="{1C0C36A4-0946-4E66-B11B-8661CBFC2474}"/>
-              </a:ext>
-            </a:extLst>
-          </p:cNvPr>
-          <p:cNvSpPr>
-            <a:spLocks xmlns:a="http://schemas.openxmlformats.org/drawingml/2006/main" noGrp="1"/>
-          </p:cNvSpPr>
-          <p:nvPr/>
-        </p:nvSpPr>
-        <p:spPr>
-          <a:xfrm xmlns:a="http://schemas.openxmlformats.org/drawingml/2006/main">
-            <a:off x="1000125" y="2990850"/>
-            <a:ext cx="476250" cy="476250"/>
-          </a:xfrm>
-          <a:prstGeom xmlns:a="http://schemas.openxmlformats.org/drawingml/2006/main" prst="ellipse">
+                <a16:creationId xmlns:a16="http://schemas.microsoft.com/office/drawing/2014/main" id="{834196C2-CEBD-4E83-9A48-9A910CF2482F}"/>
+              </a:ext>
+            </a:extLst>
+          </p:cNvPr>
+          <p:cNvSpPr>
+            <a:spLocks xmlns:a="http://schemas.openxmlformats.org/drawingml/2006/main" noGrp="1"/>
+          </p:cNvSpPr>
+          <p:nvPr/>
+        </p:nvSpPr>
+        <p:spPr>
+          <a:xfrm xmlns:a="http://schemas.openxmlformats.org/drawingml/2006/main">
+            <a:off x="1714500" y="2771775"/>
+            <a:ext cx="9334500" cy="9525"/>
+          </a:xfrm>
+          <a:prstGeom xmlns:a="http://schemas.openxmlformats.org/drawingml/2006/main" prst="rect">
             <a:avLst/>
           </a:prstGeom>
           <a:solidFill xmlns:a="http://schemas.openxmlformats.org/drawingml/2006/main">
-            <a:srgbClr val="2C6E73"/>
+            <a:srgbClr val="D9E0E6"/>
           </a:solidFill>
           <a:ln xmlns:a="http://schemas.openxmlformats.org/drawingml/2006/main" w="0">
-            <a:noFill/>
+            <a:solidFill>
+              <a:srgbClr val="D9E0E6"/>
+            </a:solidFill>
           </a:ln>
         </p:spPr>
       </p:sp>
@@ -8441,19 +8445,19 @@
           <p:cNvPr id="15" name="">
             <a:extLst xmlns:a="http://schemas.openxmlformats.org/drawingml/2006/main">
               <a:ext uri="{FF2B5EF4-FFF2-40B4-BE49-F238E27FC236}">
-                <a16:creationId xmlns:a16="http://schemas.microsoft.com/office/drawing/2014/main" id="{43708C85-90B3-4771-8BF7-3F42064EC1EE}"/>
-              </a:ext>
-            </a:extLst>
-          </p:cNvPr>
-          <p:cNvSpPr>
-            <a:spLocks xmlns:a="http://schemas.openxmlformats.org/drawingml/2006/main" noGrp="1"/>
-          </p:cNvSpPr>
-          <p:nvPr/>
-        </p:nvSpPr>
-        <p:spPr>
-          <a:xfrm xmlns:a="http://schemas.openxmlformats.org/drawingml/2006/main">
-            <a:off x="1000125" y="3019425"/>
-            <a:ext cx="476250" cy="419100"/>
+                <a16:creationId xmlns:a16="http://schemas.microsoft.com/office/drawing/2014/main" id="{7D7509AA-415A-4EB3-B661-4A7D2F59C48E}"/>
+              </a:ext>
+            </a:extLst>
+          </p:cNvPr>
+          <p:cNvSpPr>
+            <a:spLocks xmlns:a="http://schemas.openxmlformats.org/drawingml/2006/main" noGrp="1"/>
+          </p:cNvSpPr>
+          <p:nvPr/>
+        </p:nvSpPr>
+        <p:spPr>
+          <a:xfrm xmlns:a="http://schemas.openxmlformats.org/drawingml/2006/main">
+            <a:off x="1162050" y="2905125"/>
+            <a:ext cx="400050" cy="400050"/>
           </a:xfrm>
           <a:prstGeom xmlns:a="http://schemas.openxmlformats.org/drawingml/2006/main" prst="rect">
             <a:avLst/>
@@ -8470,9 +8474,9 @@
           <a:lstStyle xmlns:a="http://schemas.openxmlformats.org/drawingml/2006/main"/>
           <a:p xmlns:a="http://schemas.openxmlformats.org/drawingml/2006/main">
             <a:pPr algn="ctr">
-              <a:defRPr sz="1350" b="1">
-                <a:solidFill>
-                  <a:srgbClr val="FFFFFF"/>
+              <a:defRPr sz="1125" b="1">
+                <a:solidFill>
+                  <a:srgbClr val="2C6E73"/>
                 </a:solidFill>
                 <a:latin typeface="Arial"/>
                 <a:ea typeface="Arial"/>
@@ -8480,9 +8484,9 @@
               </a:defRPr>
             </a:pPr>
             <a:r>
-              <a:rPr sz="1350" b="1">
-                <a:solidFill>
-                  <a:srgbClr val="FFFFFF"/>
+              <a:rPr sz="1125" b="1">
+                <a:solidFill>
+                  <a:srgbClr val="2C6E73"/>
                 </a:solidFill>
                 <a:latin typeface="Arial"/>
                 <a:ea typeface="Arial"/>
@@ -8498,19 +8502,19 @@
           <p:cNvPr id="16" name="">
             <a:extLst xmlns:a="http://schemas.openxmlformats.org/drawingml/2006/main">
               <a:ext uri="{FF2B5EF4-FFF2-40B4-BE49-F238E27FC236}">
-                <a16:creationId xmlns:a16="http://schemas.microsoft.com/office/drawing/2014/main" id="{C76A4640-5207-40BF-B392-7471C8F70B77}"/>
-              </a:ext>
-            </a:extLst>
-          </p:cNvPr>
-          <p:cNvSpPr>
-            <a:spLocks xmlns:a="http://schemas.openxmlformats.org/drawingml/2006/main" noGrp="1"/>
-          </p:cNvSpPr>
-          <p:nvPr/>
-        </p:nvSpPr>
-        <p:spPr>
-          <a:xfrm xmlns:a="http://schemas.openxmlformats.org/drawingml/2006/main">
-            <a:off x="1714500" y="2924175"/>
-            <a:ext cx="9429750" cy="609600"/>
+                <a16:creationId xmlns:a16="http://schemas.microsoft.com/office/drawing/2014/main" id="{3D8C33F5-1511-43C5-AFF4-84B1D994746B}"/>
+              </a:ext>
+            </a:extLst>
+          </p:cNvPr>
+          <p:cNvSpPr>
+            <a:spLocks xmlns:a="http://schemas.openxmlformats.org/drawingml/2006/main" noGrp="1"/>
+          </p:cNvSpPr>
+          <p:nvPr/>
+        </p:nvSpPr>
+        <p:spPr>
+          <a:xfrm xmlns:a="http://schemas.openxmlformats.org/drawingml/2006/main">
+            <a:off x="1714500" y="2819400"/>
+            <a:ext cx="9525000" cy="638175"/>
           </a:xfrm>
           <a:prstGeom xmlns:a="http://schemas.openxmlformats.org/drawingml/2006/main" prst="rect">
             <a:avLst/>
@@ -8527,7 +8531,7 @@
           <a:lstStyle xmlns:a="http://schemas.openxmlformats.org/drawingml/2006/main"/>
           <a:p xmlns:a="http://schemas.openxmlformats.org/drawingml/2006/main">
             <a:pPr algn="l">
-              <a:defRPr sz="1500" b="0">
+              <a:defRPr sz="1575" b="0">
                 <a:solidFill>
                   <a:srgbClr val="17253A"/>
                 </a:solidFill>
@@ -8537,7 +8541,7 @@
               </a:defRPr>
             </a:pPr>
             <a:r>
-              <a:rPr sz="1500" b="0">
+              <a:rPr sz="1575" b="0">
                 <a:solidFill>
                   <a:srgbClr val="17253A"/>
                 </a:solidFill>
@@ -8545,7 +8549,7 @@
                 <a:ea typeface="Arial"/>
                 <a:cs typeface="Arial"/>
               </a:rPr>
-              <a:t>Set up the method: Add or subtract the numerators while keeping the denominator.</a:t>
+              <a:t>3 6/12 - 1 9/12 + 8/12</a:t>
             </a:r>
           </a:p>
         </p:txBody>
@@ -8555,28 +8559,30 @@
           <p:cNvPr id="17" name="">
             <a:extLst xmlns:a="http://schemas.openxmlformats.org/drawingml/2006/main">
               <a:ext uri="{FF2B5EF4-FFF2-40B4-BE49-F238E27FC236}">
-                <a16:creationId xmlns:a16="http://schemas.microsoft.com/office/drawing/2014/main" id="{2A9E37F2-E21C-4997-9DBE-E334E441F4BA}"/>
-              </a:ext>
-            </a:extLst>
-          </p:cNvPr>
-          <p:cNvSpPr>
-            <a:spLocks xmlns:a="http://schemas.openxmlformats.org/drawingml/2006/main" noGrp="1"/>
-          </p:cNvSpPr>
-          <p:nvPr/>
-        </p:nvSpPr>
-        <p:spPr>
-          <a:xfrm xmlns:a="http://schemas.openxmlformats.org/drawingml/2006/main">
-            <a:off x="1000125" y="3733800"/>
-            <a:ext cx="476250" cy="476250"/>
-          </a:xfrm>
-          <a:prstGeom xmlns:a="http://schemas.openxmlformats.org/drawingml/2006/main" prst="ellipse">
+                <a16:creationId xmlns:a16="http://schemas.microsoft.com/office/drawing/2014/main" id="{060B48EC-1D0B-44A8-9FBC-B417D70CB1A3}"/>
+              </a:ext>
+            </a:extLst>
+          </p:cNvPr>
+          <p:cNvSpPr>
+            <a:spLocks xmlns:a="http://schemas.openxmlformats.org/drawingml/2006/main" noGrp="1"/>
+          </p:cNvSpPr>
+          <p:nvPr/>
+        </p:nvSpPr>
+        <p:spPr>
+          <a:xfrm xmlns:a="http://schemas.openxmlformats.org/drawingml/2006/main">
+            <a:off x="1714500" y="3476625"/>
+            <a:ext cx="9334500" cy="9525"/>
+          </a:xfrm>
+          <a:prstGeom xmlns:a="http://schemas.openxmlformats.org/drawingml/2006/main" prst="rect">
             <a:avLst/>
           </a:prstGeom>
           <a:solidFill xmlns:a="http://schemas.openxmlformats.org/drawingml/2006/main">
-            <a:srgbClr val="2C6E73"/>
+            <a:srgbClr val="D9E0E6"/>
           </a:solidFill>
           <a:ln xmlns:a="http://schemas.openxmlformats.org/drawingml/2006/main" w="0">
-            <a:noFill/>
+            <a:solidFill>
+              <a:srgbClr val="D9E0E6"/>
+            </a:solidFill>
           </a:ln>
         </p:spPr>
       </p:sp>
@@ -8585,19 +8591,19 @@
           <p:cNvPr id="18" name="">
             <a:extLst xmlns:a="http://schemas.openxmlformats.org/drawingml/2006/main">
               <a:ext uri="{FF2B5EF4-FFF2-40B4-BE49-F238E27FC236}">
-                <a16:creationId xmlns:a16="http://schemas.microsoft.com/office/drawing/2014/main" id="{FF7CB61C-8F35-42A8-80F0-6D02D754A134}"/>
-              </a:ext>
-            </a:extLst>
-          </p:cNvPr>
-          <p:cNvSpPr>
-            <a:spLocks xmlns:a="http://schemas.openxmlformats.org/drawingml/2006/main" noGrp="1"/>
-          </p:cNvSpPr>
-          <p:nvPr/>
-        </p:nvSpPr>
-        <p:spPr>
-          <a:xfrm xmlns:a="http://schemas.openxmlformats.org/drawingml/2006/main">
-            <a:off x="1000125" y="3762375"/>
-            <a:ext cx="476250" cy="419100"/>
+                <a16:creationId xmlns:a16="http://schemas.microsoft.com/office/drawing/2014/main" id="{CAAEF35D-B53F-4517-B082-516EC334AF06}"/>
+              </a:ext>
+            </a:extLst>
+          </p:cNvPr>
+          <p:cNvSpPr>
+            <a:spLocks xmlns:a="http://schemas.openxmlformats.org/drawingml/2006/main" noGrp="1"/>
+          </p:cNvSpPr>
+          <p:nvPr/>
+        </p:nvSpPr>
+        <p:spPr>
+          <a:xfrm xmlns:a="http://schemas.openxmlformats.org/drawingml/2006/main">
+            <a:off x="1162050" y="3609975"/>
+            <a:ext cx="400050" cy="400050"/>
           </a:xfrm>
           <a:prstGeom xmlns:a="http://schemas.openxmlformats.org/drawingml/2006/main" prst="rect">
             <a:avLst/>
@@ -8614,9 +8620,9 @@
           <a:lstStyle xmlns:a="http://schemas.openxmlformats.org/drawingml/2006/main"/>
           <a:p xmlns:a="http://schemas.openxmlformats.org/drawingml/2006/main">
             <a:pPr algn="ctr">
-              <a:defRPr sz="1350" b="1">
-                <a:solidFill>
-                  <a:srgbClr val="FFFFFF"/>
+              <a:defRPr sz="1125" b="1">
+                <a:solidFill>
+                  <a:srgbClr val="2C6E73"/>
                 </a:solidFill>
                 <a:latin typeface="Arial"/>
                 <a:ea typeface="Arial"/>
@@ -8624,9 +8630,9 @@
               </a:defRPr>
             </a:pPr>
             <a:r>
-              <a:rPr sz="1350" b="1">
-                <a:solidFill>
-                  <a:srgbClr val="FFFFFF"/>
+              <a:rPr sz="1125" b="1">
+                <a:solidFill>
+                  <a:srgbClr val="2C6E73"/>
                 </a:solidFill>
                 <a:latin typeface="Arial"/>
                 <a:ea typeface="Arial"/>
@@ -8642,19 +8648,19 @@
           <p:cNvPr id="19" name="">
             <a:extLst xmlns:a="http://schemas.openxmlformats.org/drawingml/2006/main">
               <a:ext uri="{FF2B5EF4-FFF2-40B4-BE49-F238E27FC236}">
-                <a16:creationId xmlns:a16="http://schemas.microsoft.com/office/drawing/2014/main" id="{1ED6CADD-3AED-42D0-A15D-EFBA55229585}"/>
-              </a:ext>
-            </a:extLst>
-          </p:cNvPr>
-          <p:cNvSpPr>
-            <a:spLocks xmlns:a="http://schemas.openxmlformats.org/drawingml/2006/main" noGrp="1"/>
-          </p:cNvSpPr>
-          <p:nvPr/>
-        </p:nvSpPr>
-        <p:spPr>
-          <a:xfrm xmlns:a="http://schemas.openxmlformats.org/drawingml/2006/main">
-            <a:off x="1714500" y="3667125"/>
-            <a:ext cx="9429750" cy="609600"/>
+                <a16:creationId xmlns:a16="http://schemas.microsoft.com/office/drawing/2014/main" id="{BD363C39-9042-4950-B086-A1A39432F5F4}"/>
+              </a:ext>
+            </a:extLst>
+          </p:cNvPr>
+          <p:cNvSpPr>
+            <a:spLocks xmlns:a="http://schemas.openxmlformats.org/drawingml/2006/main" noGrp="1"/>
+          </p:cNvSpPr>
+          <p:nvPr/>
+        </p:nvSpPr>
+        <p:spPr>
+          <a:xfrm xmlns:a="http://schemas.openxmlformats.org/drawingml/2006/main">
+            <a:off x="1714500" y="3524250"/>
+            <a:ext cx="9525000" cy="638175"/>
           </a:xfrm>
           <a:prstGeom xmlns:a="http://schemas.openxmlformats.org/drawingml/2006/main" prst="rect">
             <a:avLst/>
@@ -8671,7 +8677,7 @@
           <a:lstStyle xmlns:a="http://schemas.openxmlformats.org/drawingml/2006/main"/>
           <a:p xmlns:a="http://schemas.openxmlformats.org/drawingml/2006/main">
             <a:pPr algn="l">
-              <a:defRPr sz="1500" b="0">
+              <a:defRPr sz="1575" b="0">
                 <a:solidFill>
                   <a:srgbClr val="17253A"/>
                 </a:solidFill>
@@ -8681,7 +8687,7 @@
               </a:defRPr>
             </a:pPr>
             <a:r>
-              <a:rPr sz="1500" b="0">
+              <a:rPr sz="1575" b="0">
                 <a:solidFill>
                   <a:srgbClr val="17253A"/>
                 </a:solidFill>
@@ -8689,7 +8695,7 @@
                 <a:ea typeface="Arial"/>
                 <a:cs typeface="Arial"/>
               </a:rPr>
-              <a:t>Complete the calculation: 2 5/12 litres.</a:t>
+              <a:t>Exchange: 2 18/12 - 1 9/12 = 1 9/12</a:t>
             </a:r>
           </a:p>
         </p:txBody>
@@ -8699,28 +8705,30 @@
           <p:cNvPr id="20" name="">
             <a:extLst xmlns:a="http://schemas.openxmlformats.org/drawingml/2006/main">
               <a:ext uri="{FF2B5EF4-FFF2-40B4-BE49-F238E27FC236}">
-                <a16:creationId xmlns:a16="http://schemas.microsoft.com/office/drawing/2014/main" id="{09497550-1A4F-429E-8CC2-079B7ED256D9}"/>
-              </a:ext>
-            </a:extLst>
-          </p:cNvPr>
-          <p:cNvSpPr>
-            <a:spLocks xmlns:a="http://schemas.openxmlformats.org/drawingml/2006/main" noGrp="1"/>
-          </p:cNvSpPr>
-          <p:nvPr/>
-        </p:nvSpPr>
-        <p:spPr>
-          <a:xfrm xmlns:a="http://schemas.openxmlformats.org/drawingml/2006/main">
-            <a:off x="1000125" y="4476750"/>
-            <a:ext cx="476250" cy="476250"/>
-          </a:xfrm>
-          <a:prstGeom xmlns:a="http://schemas.openxmlformats.org/drawingml/2006/main" prst="ellipse">
+                <a16:creationId xmlns:a16="http://schemas.microsoft.com/office/drawing/2014/main" id="{AB0A9FAE-3049-4926-AA5F-40EAC5D03B27}"/>
+              </a:ext>
+            </a:extLst>
+          </p:cNvPr>
+          <p:cNvSpPr>
+            <a:spLocks xmlns:a="http://schemas.openxmlformats.org/drawingml/2006/main" noGrp="1"/>
+          </p:cNvSpPr>
+          <p:nvPr/>
+        </p:nvSpPr>
+        <p:spPr>
+          <a:xfrm xmlns:a="http://schemas.openxmlformats.org/drawingml/2006/main">
+            <a:off x="1714500" y="4181475"/>
+            <a:ext cx="9334500" cy="9525"/>
+          </a:xfrm>
+          <a:prstGeom xmlns:a="http://schemas.openxmlformats.org/drawingml/2006/main" prst="rect">
             <a:avLst/>
           </a:prstGeom>
           <a:solidFill xmlns:a="http://schemas.openxmlformats.org/drawingml/2006/main">
-            <a:srgbClr val="2C6E73"/>
+            <a:srgbClr val="D9E0E6"/>
           </a:solidFill>
           <a:ln xmlns:a="http://schemas.openxmlformats.org/drawingml/2006/main" w="0">
-            <a:noFill/>
+            <a:solidFill>
+              <a:srgbClr val="D9E0E6"/>
+            </a:solidFill>
           </a:ln>
         </p:spPr>
       </p:sp>
@@ -8729,19 +8737,19 @@
           <p:cNvPr id="21" name="">
             <a:extLst xmlns:a="http://schemas.openxmlformats.org/drawingml/2006/main">
               <a:ext uri="{FF2B5EF4-FFF2-40B4-BE49-F238E27FC236}">
-                <a16:creationId xmlns:a16="http://schemas.microsoft.com/office/drawing/2014/main" id="{C0257160-1903-4A6F-88C2-0ED11220A1E0}"/>
-              </a:ext>
-            </a:extLst>
-          </p:cNvPr>
-          <p:cNvSpPr>
-            <a:spLocks xmlns:a="http://schemas.openxmlformats.org/drawingml/2006/main" noGrp="1"/>
-          </p:cNvSpPr>
-          <p:nvPr/>
-        </p:nvSpPr>
-        <p:spPr>
-          <a:xfrm xmlns:a="http://schemas.openxmlformats.org/drawingml/2006/main">
-            <a:off x="1000125" y="4505325"/>
-            <a:ext cx="476250" cy="419100"/>
+                <a16:creationId xmlns:a16="http://schemas.microsoft.com/office/drawing/2014/main" id="{7FC0A7C1-ADFD-4EB7-9CFC-03AE81348D26}"/>
+              </a:ext>
+            </a:extLst>
+          </p:cNvPr>
+          <p:cNvSpPr>
+            <a:spLocks xmlns:a="http://schemas.openxmlformats.org/drawingml/2006/main" noGrp="1"/>
+          </p:cNvSpPr>
+          <p:nvPr/>
+        </p:nvSpPr>
+        <p:spPr>
+          <a:xfrm xmlns:a="http://schemas.openxmlformats.org/drawingml/2006/main">
+            <a:off x="1162050" y="4314825"/>
+            <a:ext cx="400050" cy="400050"/>
           </a:xfrm>
           <a:prstGeom xmlns:a="http://schemas.openxmlformats.org/drawingml/2006/main" prst="rect">
             <a:avLst/>
@@ -8758,9 +8766,9 @@
           <a:lstStyle xmlns:a="http://schemas.openxmlformats.org/drawingml/2006/main"/>
           <a:p xmlns:a="http://schemas.openxmlformats.org/drawingml/2006/main">
             <a:pPr algn="ctr">
-              <a:defRPr sz="1350" b="1">
-                <a:solidFill>
-                  <a:srgbClr val="FFFFFF"/>
+              <a:defRPr sz="1125" b="1">
+                <a:solidFill>
+                  <a:srgbClr val="2C6E73"/>
                 </a:solidFill>
                 <a:latin typeface="Arial"/>
                 <a:ea typeface="Arial"/>
@@ -8768,9 +8776,9 @@
               </a:defRPr>
             </a:pPr>
             <a:r>
-              <a:rPr sz="1350" b="1">
-                <a:solidFill>
-                  <a:srgbClr val="FFFFFF"/>
+              <a:rPr sz="1125" b="1">
+                <a:solidFill>
+                  <a:srgbClr val="2C6E73"/>
                 </a:solidFill>
                 <a:latin typeface="Arial"/>
                 <a:ea typeface="Arial"/>
@@ -8786,19 +8794,19 @@
           <p:cNvPr id="22" name="">
             <a:extLst xmlns:a="http://schemas.openxmlformats.org/drawingml/2006/main">
               <a:ext uri="{FF2B5EF4-FFF2-40B4-BE49-F238E27FC236}">
-                <a16:creationId xmlns:a16="http://schemas.microsoft.com/office/drawing/2014/main" id="{21ACD758-8DCC-4533-909E-D5BE5BA06D9E}"/>
-              </a:ext>
-            </a:extLst>
-          </p:cNvPr>
-          <p:cNvSpPr>
-            <a:spLocks xmlns:a="http://schemas.openxmlformats.org/drawingml/2006/main" noGrp="1"/>
-          </p:cNvSpPr>
-          <p:nvPr/>
-        </p:nvSpPr>
-        <p:spPr>
-          <a:xfrm xmlns:a="http://schemas.openxmlformats.org/drawingml/2006/main">
-            <a:off x="1714500" y="4410075"/>
-            <a:ext cx="9429750" cy="609600"/>
+                <a16:creationId xmlns:a16="http://schemas.microsoft.com/office/drawing/2014/main" id="{3F90C08C-920C-4973-AF37-ACD5EEA0BD4E}"/>
+              </a:ext>
+            </a:extLst>
+          </p:cNvPr>
+          <p:cNvSpPr>
+            <a:spLocks xmlns:a="http://schemas.openxmlformats.org/drawingml/2006/main" noGrp="1"/>
+          </p:cNvSpPr>
+          <p:nvPr/>
+        </p:nvSpPr>
+        <p:spPr>
+          <a:xfrm xmlns:a="http://schemas.openxmlformats.org/drawingml/2006/main">
+            <a:off x="1714500" y="4229100"/>
+            <a:ext cx="9525000" cy="638175"/>
           </a:xfrm>
           <a:prstGeom xmlns:a="http://schemas.openxmlformats.org/drawingml/2006/main" prst="rect">
             <a:avLst/>
@@ -8815,9 +8823,9 @@
           <a:lstStyle xmlns:a="http://schemas.openxmlformats.org/drawingml/2006/main"/>
           <a:p xmlns:a="http://schemas.openxmlformats.org/drawingml/2006/main">
             <a:pPr algn="l">
-              <a:defRPr sz="1500" b="1">
-                <a:solidFill>
-                  <a:srgbClr val="2F785D"/>
+              <a:defRPr sz="1575" b="0">
+                <a:solidFill>
+                  <a:srgbClr val="17253A"/>
                 </a:solidFill>
                 <a:latin typeface="Arial"/>
                 <a:ea typeface="Arial"/>
@@ -8825,15 +8833,161 @@
               </a:defRPr>
             </a:pPr>
             <a:r>
-              <a:rPr sz="1500" b="1">
+              <a:rPr sz="1575" b="0">
+                <a:solidFill>
+                  <a:srgbClr val="17253A"/>
+                </a:solidFill>
+                <a:latin typeface="Arial"/>
+                <a:ea typeface="Arial"/>
+                <a:cs typeface="Arial"/>
+              </a:rPr>
+              <a:t>1 9/12 + 8/12 = 1 17/12</a:t>
+            </a:r>
+          </a:p>
+        </p:txBody>
+      </p:sp>
+      <p:sp>
+        <p:nvSpPr>
+          <p:cNvPr id="23" name="">
+            <a:extLst xmlns:a="http://schemas.openxmlformats.org/drawingml/2006/main">
+              <a:ext uri="{FF2B5EF4-FFF2-40B4-BE49-F238E27FC236}">
+                <a16:creationId xmlns:a16="http://schemas.microsoft.com/office/drawing/2014/main" id="{62A43E44-45F9-4E53-983D-4575DF4249E9}"/>
+              </a:ext>
+            </a:extLst>
+          </p:cNvPr>
+          <p:cNvSpPr>
+            <a:spLocks xmlns:a="http://schemas.openxmlformats.org/drawingml/2006/main" noGrp="1"/>
+          </p:cNvSpPr>
+          <p:nvPr/>
+        </p:nvSpPr>
+        <p:spPr>
+          <a:xfrm xmlns:a="http://schemas.openxmlformats.org/drawingml/2006/main">
+            <a:off x="1714500" y="4886325"/>
+            <a:ext cx="9334500" cy="9525"/>
+          </a:xfrm>
+          <a:prstGeom xmlns:a="http://schemas.openxmlformats.org/drawingml/2006/main" prst="rect">
+            <a:avLst/>
+          </a:prstGeom>
+          <a:solidFill xmlns:a="http://schemas.openxmlformats.org/drawingml/2006/main">
+            <a:srgbClr val="D9E0E6"/>
+          </a:solidFill>
+          <a:ln xmlns:a="http://schemas.openxmlformats.org/drawingml/2006/main" w="0">
+            <a:solidFill>
+              <a:srgbClr val="D9E0E6"/>
+            </a:solidFill>
+          </a:ln>
+        </p:spPr>
+      </p:sp>
+      <p:sp>
+        <p:nvSpPr>
+          <p:cNvPr id="24" name="">
+            <a:extLst xmlns:a="http://schemas.openxmlformats.org/drawingml/2006/main">
+              <a:ext uri="{FF2B5EF4-FFF2-40B4-BE49-F238E27FC236}">
+                <a16:creationId xmlns:a16="http://schemas.microsoft.com/office/drawing/2014/main" id="{B8CFAC68-2FF2-458A-A65F-71536EA200D8}"/>
+              </a:ext>
+            </a:extLst>
+          </p:cNvPr>
+          <p:cNvSpPr>
+            <a:spLocks xmlns:a="http://schemas.openxmlformats.org/drawingml/2006/main" noGrp="1"/>
+          </p:cNvSpPr>
+          <p:nvPr/>
+        </p:nvSpPr>
+        <p:spPr>
+          <a:xfrm xmlns:a="http://schemas.openxmlformats.org/drawingml/2006/main">
+            <a:off x="1162050" y="5019675"/>
+            <a:ext cx="400050" cy="400050"/>
+          </a:xfrm>
+          <a:prstGeom xmlns:a="http://schemas.openxmlformats.org/drawingml/2006/main" prst="rect">
+            <a:avLst/>
+          </a:prstGeom>
+          <a:noFill xmlns:a="http://schemas.openxmlformats.org/drawingml/2006/main"/>
+          <a:ln xmlns:a="http://schemas.openxmlformats.org/drawingml/2006/main" w="0">
+            <a:noFill/>
+          </a:ln>
+        </p:spPr>
+        <p:txBody>
+          <a:bodyPr xmlns:a="http://schemas.openxmlformats.org/drawingml/2006/main" anchor="ctr">
+            <a:normAutofit fontScale="100000"/>
+          </a:bodyPr>
+          <a:lstStyle xmlns:a="http://schemas.openxmlformats.org/drawingml/2006/main"/>
+          <a:p xmlns:a="http://schemas.openxmlformats.org/drawingml/2006/main">
+            <a:pPr algn="ctr">
+              <a:defRPr sz="1125" b="1">
                 <a:solidFill>
                   <a:srgbClr val="2F785D"/>
                 </a:solidFill>
                 <a:latin typeface="Arial"/>
                 <a:ea typeface="Arial"/>
                 <a:cs typeface="Arial"/>
+              </a:defRPr>
+            </a:pPr>
+            <a:r>
+              <a:rPr sz="1125" b="1">
+                <a:solidFill>
+                  <a:srgbClr val="2F785D"/>
+                </a:solidFill>
+                <a:latin typeface="Arial"/>
+                <a:ea typeface="Arial"/>
+                <a:cs typeface="Arial"/>
               </a:rPr>
-              <a:t>Check the result: Simplify and convert the answer when appropriate.</a:t>
+              <a:t>5</a:t>
+            </a:r>
+          </a:p>
+        </p:txBody>
+      </p:sp>
+      <p:sp>
+        <p:nvSpPr>
+          <p:cNvPr id="25" name="">
+            <a:extLst xmlns:a="http://schemas.openxmlformats.org/drawingml/2006/main">
+              <a:ext uri="{FF2B5EF4-FFF2-40B4-BE49-F238E27FC236}">
+                <a16:creationId xmlns:a16="http://schemas.microsoft.com/office/drawing/2014/main" id="{544950F4-0044-4FC7-B0B6-2DF03856CF78}"/>
+              </a:ext>
+            </a:extLst>
+          </p:cNvPr>
+          <p:cNvSpPr>
+            <a:spLocks xmlns:a="http://schemas.openxmlformats.org/drawingml/2006/main" noGrp="1"/>
+          </p:cNvSpPr>
+          <p:nvPr/>
+        </p:nvSpPr>
+        <p:spPr>
+          <a:xfrm xmlns:a="http://schemas.openxmlformats.org/drawingml/2006/main">
+            <a:off x="1714500" y="4933950"/>
+            <a:ext cx="9525000" cy="638175"/>
+          </a:xfrm>
+          <a:prstGeom xmlns:a="http://schemas.openxmlformats.org/drawingml/2006/main" prst="rect">
+            <a:avLst/>
+          </a:prstGeom>
+          <a:noFill xmlns:a="http://schemas.openxmlformats.org/drawingml/2006/main"/>
+          <a:ln xmlns:a="http://schemas.openxmlformats.org/drawingml/2006/main" w="0">
+            <a:noFill/>
+          </a:ln>
+        </p:spPr>
+        <p:txBody>
+          <a:bodyPr xmlns:a="http://schemas.openxmlformats.org/drawingml/2006/main" anchor="ctr">
+            <a:normAutofit fontScale="100000"/>
+          </a:bodyPr>
+          <a:lstStyle xmlns:a="http://schemas.openxmlformats.org/drawingml/2006/main"/>
+          <a:p xmlns:a="http://schemas.openxmlformats.org/drawingml/2006/main">
+            <a:pPr algn="l">
+              <a:defRPr sz="1575" b="1">
+                <a:solidFill>
+                  <a:srgbClr val="2F785D"/>
+                </a:solidFill>
+                <a:latin typeface="Arial"/>
+                <a:ea typeface="Arial"/>
+                <a:cs typeface="Arial"/>
+              </a:defRPr>
+            </a:pPr>
+            <a:r>
+              <a:rPr sz="1575" b="1">
+                <a:solidFill>
+                  <a:srgbClr val="2F785D"/>
+                </a:solidFill>
+                <a:latin typeface="Arial"/>
+                <a:ea typeface="Arial"/>
+                <a:cs typeface="Arial"/>
+              </a:rPr>
+              <a:t>2 5/12 litres</a:t>
             </a:r>
           </a:p>
         </p:txBody>
@@ -8841,7 +8995,7 @@
     </p:spTree>
     <p:extLst>
       <p:ext uri="{BB962C8B-B14F-4D97-AF65-F5344CB8AC3E}">
-        <p14:creationId xmlns:p14="http://schemas.microsoft.com/office/powerpoint/2010/main" val="1872198770"/>
+        <p14:creationId xmlns:p14="http://schemas.microsoft.com/office/powerpoint/2010/main" val="1712658281"/>
       </p:ext>
     </p:extLst>
   </p:cSld>
@@ -9078,6 +9232,51 @@
                       </p:childTnLst>
                     </p:cTn>
                   </p:par>
+                  <p:par>
+                    <p:cTn id="23" fill="hold">
+                      <p:stCondLst>
+                        <p:cond delay="indefinite"/>
+                      </p:stCondLst>
+                      <p:childTnLst>
+                        <p:par>
+                          <p:cTn id="24" fill="hold">
+                            <p:stCondLst>
+                              <p:cond delay="0"/>
+                            </p:stCondLst>
+                            <p:childTnLst>
+                              <p:par>
+                                <p:cTn id="25" presetID="1" presetClass="entr" presetSubtype="0" fill="hold" grpId="0" nodeType="clickEffect">
+                                  <p:stCondLst>
+                                    <p:cond delay="0"/>
+                                  </p:stCondLst>
+                                  <p:childTnLst>
+                                    <p:set>
+                                      <p:cBhvr>
+                                        <p:cTn id="26" dur="1" fill="hold">
+                                          <p:stCondLst>
+                                            <p:cond delay="0"/>
+                                          </p:stCondLst>
+                                        </p:cTn>
+                                        <p:tgtEl>
+                                          <p:spTgt spid="25"/>
+                                        </p:tgtEl>
+                                        <p:attrNameLst>
+                                          <p:attrName>style.visibility</p:attrName>
+                                        </p:attrNameLst>
+                                      </p:cBhvr>
+                                      <p:to>
+                                        <p:strVal val="visible"/>
+                                      </p:to>
+                                    </p:set>
+                                  </p:childTnLst>
+                                </p:cTn>
+                              </p:par>
+                            </p:childTnLst>
+                          </p:cTn>
+                        </p:par>
+                      </p:childTnLst>
+                    </p:cTn>
+                  </p:par>
                 </p:childTnLst>
               </p:cTn>
               <p:prevCondLst>
@@ -9105,6 +9304,7 @@
       <p:bldP spid="16" grpId="0"/>
       <p:bldP spid="19" grpId="0"/>
       <p:bldP spid="22" grpId="0"/>
+      <p:bldP spid="25" grpId="0"/>
     </p:bldLst>
   </p:timing>
 </p:sld>
@@ -9134,7 +9334,7 @@
           <p:cNvPr id="15" name="">
             <a:extLst xmlns:a="http://schemas.openxmlformats.org/drawingml/2006/main">
               <a:ext uri="{FF2B5EF4-FFF2-40B4-BE49-F238E27FC236}">
-                <a16:creationId xmlns:a16="http://schemas.microsoft.com/office/drawing/2014/main" id="{EDBDBB9D-1F74-4ADA-B0A6-338B6D26BBB9}"/>
+                <a16:creationId xmlns:a16="http://schemas.microsoft.com/office/drawing/2014/main" id="{E14A57FA-EECB-42E6-964B-EF849D52AFFC}"/>
               </a:ext>
             </a:extLst>
           </p:cNvPr>
@@ -9166,7 +9366,7 @@
           <p:cNvPr id="2" name="">
             <a:extLst xmlns:a="http://schemas.openxmlformats.org/drawingml/2006/main">
               <a:ext uri="{FF2B5EF4-FFF2-40B4-BE49-F238E27FC236}">
-                <a16:creationId xmlns:a16="http://schemas.microsoft.com/office/drawing/2014/main" id="{C14DE46A-A7CC-482A-AB61-7B044EE708AF}"/>
+                <a16:creationId xmlns:a16="http://schemas.microsoft.com/office/drawing/2014/main" id="{7DAC6146-B63F-4D29-8E24-42FC22B26F6E}"/>
               </a:ext>
             </a:extLst>
           </p:cNvPr>
@@ -9223,7 +9423,7 @@
           <p:cNvPr id="3" name="">
             <a:extLst xmlns:a="http://schemas.openxmlformats.org/drawingml/2006/main">
               <a:ext uri="{FF2B5EF4-FFF2-40B4-BE49-F238E27FC236}">
-                <a16:creationId xmlns:a16="http://schemas.microsoft.com/office/drawing/2014/main" id="{A1AE9F27-7032-4666-B1EA-2DE5E0BB295F}"/>
+                <a16:creationId xmlns:a16="http://schemas.microsoft.com/office/drawing/2014/main" id="{EF087DCB-CB56-4A5B-8E93-662D159BCDE8}"/>
               </a:ext>
             </a:extLst>
           </p:cNvPr>
@@ -9255,7 +9455,7 @@
           <p:cNvPr id="4" name="">
             <a:extLst xmlns:a="http://schemas.openxmlformats.org/drawingml/2006/main">
               <a:ext uri="{FF2B5EF4-FFF2-40B4-BE49-F238E27FC236}">
-                <a16:creationId xmlns:a16="http://schemas.microsoft.com/office/drawing/2014/main" id="{899A2D41-8356-49DB-A37F-B3FA7168237E}"/>
+                <a16:creationId xmlns:a16="http://schemas.microsoft.com/office/drawing/2014/main" id="{85D33D3F-D969-459E-B290-825E062ED661}"/>
               </a:ext>
             </a:extLst>
           </p:cNvPr>
@@ -9312,7 +9512,7 @@
           <p:cNvPr id="5" name="">
             <a:extLst xmlns:a="http://schemas.openxmlformats.org/drawingml/2006/main">
               <a:ext uri="{FF2B5EF4-FFF2-40B4-BE49-F238E27FC236}">
-                <a16:creationId xmlns:a16="http://schemas.microsoft.com/office/drawing/2014/main" id="{629D15DD-6E13-45A5-A2EB-373AD470F915}"/>
+                <a16:creationId xmlns:a16="http://schemas.microsoft.com/office/drawing/2014/main" id="{1CA64B29-0FED-408B-978A-DA68F698F032}"/>
               </a:ext>
             </a:extLst>
           </p:cNvPr>
@@ -9369,7 +9569,7 @@
           <p:cNvPr id="6" name="">
             <a:extLst xmlns:a="http://schemas.openxmlformats.org/drawingml/2006/main">
               <a:ext uri="{FF2B5EF4-FFF2-40B4-BE49-F238E27FC236}">
-                <a16:creationId xmlns:a16="http://schemas.microsoft.com/office/drawing/2014/main" id="{157C0A74-143C-4D97-93D7-B36FE9AF738D}"/>
+                <a16:creationId xmlns:a16="http://schemas.microsoft.com/office/drawing/2014/main" id="{931557B8-537E-475F-BEDE-B610E5711589}"/>
               </a:ext>
             </a:extLst>
           </p:cNvPr>
@@ -9426,7 +9626,7 @@
           <p:cNvPr id="7" name="">
             <a:extLst xmlns:a="http://schemas.openxmlformats.org/drawingml/2006/main">
               <a:ext uri="{FF2B5EF4-FFF2-40B4-BE49-F238E27FC236}">
-                <a16:creationId xmlns:a16="http://schemas.microsoft.com/office/drawing/2014/main" id="{DDA7876C-7129-416F-AC11-4997683DB00B}"/>
+                <a16:creationId xmlns:a16="http://schemas.microsoft.com/office/drawing/2014/main" id="{329AD952-3B3D-4C17-B640-713EFF96CD1F}"/>
               </a:ext>
             </a:extLst>
           </p:cNvPr>
@@ -9458,7 +9658,7 @@
           <p:cNvPr id="8" name="">
             <a:extLst xmlns:a="http://schemas.openxmlformats.org/drawingml/2006/main">
               <a:ext uri="{FF2B5EF4-FFF2-40B4-BE49-F238E27FC236}">
-                <a16:creationId xmlns:a16="http://schemas.microsoft.com/office/drawing/2014/main" id="{7FBBBAAC-6413-4718-9759-D0E69BF30B8B}"/>
+                <a16:creationId xmlns:a16="http://schemas.microsoft.com/office/drawing/2014/main" id="{736089EB-A4D8-4968-9AD6-5A511B0E108D}"/>
               </a:ext>
             </a:extLst>
           </p:cNvPr>
@@ -9515,7 +9715,7 @@
           <p:cNvPr id="9" name="">
             <a:extLst xmlns:a="http://schemas.openxmlformats.org/drawingml/2006/main">
               <a:ext uri="{FF2B5EF4-FFF2-40B4-BE49-F238E27FC236}">
-                <a16:creationId xmlns:a16="http://schemas.microsoft.com/office/drawing/2014/main" id="{EDE7D5CD-B1CB-45E4-BC9E-8A652BC28EB2}"/>
+                <a16:creationId xmlns:a16="http://schemas.microsoft.com/office/drawing/2014/main" id="{7252BE54-CAAE-4854-AED3-A947DAA16FD2}"/>
               </a:ext>
             </a:extLst>
           </p:cNvPr>
@@ -9572,7 +9772,7 @@
           <p:cNvPr id="10" name="">
             <a:extLst xmlns:a="http://schemas.openxmlformats.org/drawingml/2006/main">
               <a:ext uri="{FF2B5EF4-FFF2-40B4-BE49-F238E27FC236}">
-                <a16:creationId xmlns:a16="http://schemas.microsoft.com/office/drawing/2014/main" id="{BC0596F9-381B-4BE2-864B-585983BFA9B6}"/>
+                <a16:creationId xmlns:a16="http://schemas.microsoft.com/office/drawing/2014/main" id="{63F3F4AA-076B-4471-A696-23317A7BDEE5}"/>
               </a:ext>
             </a:extLst>
           </p:cNvPr>
@@ -9629,7 +9829,7 @@
           <p:cNvPr id="11" name="">
             <a:extLst xmlns:a="http://schemas.openxmlformats.org/drawingml/2006/main">
               <a:ext uri="{FF2B5EF4-FFF2-40B4-BE49-F238E27FC236}">
-                <a16:creationId xmlns:a16="http://schemas.microsoft.com/office/drawing/2014/main" id="{E043C62F-AE57-4A55-A1DC-6EC88A690FF0}"/>
+                <a16:creationId xmlns:a16="http://schemas.microsoft.com/office/drawing/2014/main" id="{A564A237-3438-4B4F-A30F-A2913534CAE8}"/>
               </a:ext>
             </a:extLst>
           </p:cNvPr>
@@ -9686,7 +9886,7 @@
           <p:cNvPr id="12" name="">
             <a:extLst xmlns:a="http://schemas.openxmlformats.org/drawingml/2006/main">
               <a:ext uri="{FF2B5EF4-FFF2-40B4-BE49-F238E27FC236}">
-                <a16:creationId xmlns:a16="http://schemas.microsoft.com/office/drawing/2014/main" id="{4421539B-EBB3-4CB2-8C57-70443C4D903F}"/>
+                <a16:creationId xmlns:a16="http://schemas.microsoft.com/office/drawing/2014/main" id="{F02CD010-DB4B-425C-A59F-6C7512A08227}"/>
               </a:ext>
             </a:extLst>
           </p:cNvPr>
@@ -9718,7 +9918,7 @@
           <p:cNvPr id="13" name="">
             <a:extLst xmlns:a="http://schemas.openxmlformats.org/drawingml/2006/main">
               <a:ext uri="{FF2B5EF4-FFF2-40B4-BE49-F238E27FC236}">
-                <a16:creationId xmlns:a16="http://schemas.microsoft.com/office/drawing/2014/main" id="{440BAC79-346B-42D4-8592-061270AB90D7}"/>
+                <a16:creationId xmlns:a16="http://schemas.microsoft.com/office/drawing/2014/main" id="{CD015E8A-A6C3-4029-868B-4BD35E92E090}"/>
               </a:ext>
             </a:extLst>
           </p:cNvPr>
@@ -9775,7 +9975,7 @@
           <p:cNvPr id="14" name="">
             <a:extLst xmlns:a="http://schemas.openxmlformats.org/drawingml/2006/main">
               <a:ext uri="{FF2B5EF4-FFF2-40B4-BE49-F238E27FC236}">
-                <a16:creationId xmlns:a16="http://schemas.microsoft.com/office/drawing/2014/main" id="{9DCF78EE-F49C-4733-B21A-749BB42EF8AF}"/>
+                <a16:creationId xmlns:a16="http://schemas.microsoft.com/office/drawing/2014/main" id="{7B330CE3-8C3A-4393-9F8C-BA37C15EA0E9}"/>
               </a:ext>
             </a:extLst>
           </p:cNvPr>
@@ -9830,7 +10030,7 @@
     </p:spTree>
     <p:extLst>
       <p:ext uri="{BB962C8B-B14F-4D97-AF65-F5344CB8AC3E}">
-        <p14:creationId xmlns:p14="http://schemas.microsoft.com/office/powerpoint/2010/main" val="168164204"/>
+        <p14:creationId xmlns:p14="http://schemas.microsoft.com/office/powerpoint/2010/main" val="507326671"/>
       </p:ext>
     </p:extLst>
   </p:cSld>
@@ -10031,7 +10231,7 @@
           <p:cNvPr id="16" name="">
             <a:extLst xmlns:a="http://schemas.openxmlformats.org/drawingml/2006/main">
               <a:ext uri="{FF2B5EF4-FFF2-40B4-BE49-F238E27FC236}">
-                <a16:creationId xmlns:a16="http://schemas.microsoft.com/office/drawing/2014/main" id="{5A4C9480-4248-4B53-9D46-BCD639D1CD13}"/>
+                <a16:creationId xmlns:a16="http://schemas.microsoft.com/office/drawing/2014/main" id="{E329E359-0D49-4295-92FD-2E6C5F70588F}"/>
               </a:ext>
             </a:extLst>
           </p:cNvPr>
@@ -10063,7 +10263,7 @@
           <p:cNvPr id="2" name="">
             <a:extLst xmlns:a="http://schemas.openxmlformats.org/drawingml/2006/main">
               <a:ext uri="{FF2B5EF4-FFF2-40B4-BE49-F238E27FC236}">
-                <a16:creationId xmlns:a16="http://schemas.microsoft.com/office/drawing/2014/main" id="{0C877813-01D4-41EF-8930-E655B70D0F6A}"/>
+                <a16:creationId xmlns:a16="http://schemas.microsoft.com/office/drawing/2014/main" id="{1EB8DDDF-601D-48C1-A530-42C166783884}"/>
               </a:ext>
             </a:extLst>
           </p:cNvPr>
@@ -10120,7 +10320,7 @@
           <p:cNvPr id="3" name="">
             <a:extLst xmlns:a="http://schemas.openxmlformats.org/drawingml/2006/main">
               <a:ext uri="{FF2B5EF4-FFF2-40B4-BE49-F238E27FC236}">
-                <a16:creationId xmlns:a16="http://schemas.microsoft.com/office/drawing/2014/main" id="{57A0ABA7-ABA1-4E78-A116-EE232C40E490}"/>
+                <a16:creationId xmlns:a16="http://schemas.microsoft.com/office/drawing/2014/main" id="{94BA28CA-CC27-4020-B661-BD435ABF9425}"/>
               </a:ext>
             </a:extLst>
           </p:cNvPr>
@@ -10152,7 +10352,7 @@
           <p:cNvPr id="4" name="">
             <a:extLst xmlns:a="http://schemas.openxmlformats.org/drawingml/2006/main">
               <a:ext uri="{FF2B5EF4-FFF2-40B4-BE49-F238E27FC236}">
-                <a16:creationId xmlns:a16="http://schemas.microsoft.com/office/drawing/2014/main" id="{2244AE48-4F15-4475-98E1-CBFE93259A5D}"/>
+                <a16:creationId xmlns:a16="http://schemas.microsoft.com/office/drawing/2014/main" id="{C8D09B28-943C-4275-81E6-D601D24A016A}"/>
               </a:ext>
             </a:extLst>
           </p:cNvPr>
@@ -10209,7 +10409,7 @@
           <p:cNvPr id="5" name="">
             <a:extLst xmlns:a="http://schemas.openxmlformats.org/drawingml/2006/main">
               <a:ext uri="{FF2B5EF4-FFF2-40B4-BE49-F238E27FC236}">
-                <a16:creationId xmlns:a16="http://schemas.microsoft.com/office/drawing/2014/main" id="{3601EB35-1774-470F-B2AD-986432199E96}"/>
+                <a16:creationId xmlns:a16="http://schemas.microsoft.com/office/drawing/2014/main" id="{7EA55F9C-1549-40AD-AC45-BEFE72E6B89C}"/>
               </a:ext>
             </a:extLst>
           </p:cNvPr>
@@ -10266,7 +10466,7 @@
           <p:cNvPr id="6" name="">
             <a:extLst xmlns:a="http://schemas.openxmlformats.org/drawingml/2006/main">
               <a:ext uri="{FF2B5EF4-FFF2-40B4-BE49-F238E27FC236}">
-                <a16:creationId xmlns:a16="http://schemas.microsoft.com/office/drawing/2014/main" id="{E3A999F5-4BD3-4E76-8FB3-10B921CCF7A7}"/>
+                <a16:creationId xmlns:a16="http://schemas.microsoft.com/office/drawing/2014/main" id="{EB2BC4C3-FCFD-47FF-9D82-6F03BDD88F47}"/>
               </a:ext>
             </a:extLst>
           </p:cNvPr>
@@ -10323,7 +10523,7 @@
           <p:cNvPr id="7" name="">
             <a:extLst xmlns:a="http://schemas.openxmlformats.org/drawingml/2006/main">
               <a:ext uri="{FF2B5EF4-FFF2-40B4-BE49-F238E27FC236}">
-                <a16:creationId xmlns:a16="http://schemas.microsoft.com/office/drawing/2014/main" id="{6081BCDD-DC48-460A-81E2-33765E81FBC6}"/>
+                <a16:creationId xmlns:a16="http://schemas.microsoft.com/office/drawing/2014/main" id="{17B90C24-61D3-49DF-9E33-91311E1BF92B}"/>
               </a:ext>
             </a:extLst>
           </p:cNvPr>
@@ -10355,7 +10555,7 @@
           <p:cNvPr id="8" name="">
             <a:extLst xmlns:a="http://schemas.openxmlformats.org/drawingml/2006/main">
               <a:ext uri="{FF2B5EF4-FFF2-40B4-BE49-F238E27FC236}">
-                <a16:creationId xmlns:a16="http://schemas.microsoft.com/office/drawing/2014/main" id="{E29BF447-051E-48FF-ABF5-37DCFCB80F70}"/>
+                <a16:creationId xmlns:a16="http://schemas.microsoft.com/office/drawing/2014/main" id="{200C8731-E942-4B92-BCA5-9D2A8DBC7FA9}"/>
               </a:ext>
             </a:extLst>
           </p:cNvPr>
@@ -10412,7 +10612,7 @@
           <p:cNvPr id="9" name="">
             <a:extLst xmlns:a="http://schemas.openxmlformats.org/drawingml/2006/main">
               <a:ext uri="{FF2B5EF4-FFF2-40B4-BE49-F238E27FC236}">
-                <a16:creationId xmlns:a16="http://schemas.microsoft.com/office/drawing/2014/main" id="{BE18A86E-BC3C-4F7C-AB9E-A005D2EE5FEB}"/>
+                <a16:creationId xmlns:a16="http://schemas.microsoft.com/office/drawing/2014/main" id="{E8AE5ABB-F207-48A0-A7BA-0B4EC7251480}"/>
               </a:ext>
             </a:extLst>
           </p:cNvPr>
@@ -10469,7 +10669,7 @@
           <p:cNvPr id="10" name="">
             <a:extLst xmlns:a="http://schemas.openxmlformats.org/drawingml/2006/main">
               <a:ext uri="{FF2B5EF4-FFF2-40B4-BE49-F238E27FC236}">
-                <a16:creationId xmlns:a16="http://schemas.microsoft.com/office/drawing/2014/main" id="{060BA837-9160-4A14-8985-D37E0346D4AE}"/>
+                <a16:creationId xmlns:a16="http://schemas.microsoft.com/office/drawing/2014/main" id="{A75B0116-0544-482D-9C1B-65D5D55BDF66}"/>
               </a:ext>
             </a:extLst>
           </p:cNvPr>
@@ -10526,7 +10726,7 @@
           <p:cNvPr id="11" name="">
             <a:extLst xmlns:a="http://schemas.openxmlformats.org/drawingml/2006/main">
               <a:ext uri="{FF2B5EF4-FFF2-40B4-BE49-F238E27FC236}">
-                <a16:creationId xmlns:a16="http://schemas.microsoft.com/office/drawing/2014/main" id="{3C7DF661-6E1F-407A-908F-4911FC1E4397}"/>
+                <a16:creationId xmlns:a16="http://schemas.microsoft.com/office/drawing/2014/main" id="{5782A692-8659-409E-947E-57B9F513F179}"/>
               </a:ext>
             </a:extLst>
           </p:cNvPr>
@@ -10583,7 +10783,7 @@
           <p:cNvPr id="12" name="">
             <a:extLst xmlns:a="http://schemas.openxmlformats.org/drawingml/2006/main">
               <a:ext uri="{FF2B5EF4-FFF2-40B4-BE49-F238E27FC236}">
-                <a16:creationId xmlns:a16="http://schemas.microsoft.com/office/drawing/2014/main" id="{4B35116E-3660-4F08-9533-8D291EC84642}"/>
+                <a16:creationId xmlns:a16="http://schemas.microsoft.com/office/drawing/2014/main" id="{645BF6B9-0D1A-4E97-B43B-9124B84F9DD7}"/>
               </a:ext>
             </a:extLst>
           </p:cNvPr>
@@ -10640,7 +10840,7 @@
           <p:cNvPr id="13" name="">
             <a:extLst xmlns:a="http://schemas.openxmlformats.org/drawingml/2006/main">
               <a:ext uri="{FF2B5EF4-FFF2-40B4-BE49-F238E27FC236}">
-                <a16:creationId xmlns:a16="http://schemas.microsoft.com/office/drawing/2014/main" id="{58DFB3D2-13F7-48E0-BC98-3522D438609C}"/>
+                <a16:creationId xmlns:a16="http://schemas.microsoft.com/office/drawing/2014/main" id="{68F0FB5D-FA90-46D5-B2AB-57765CA82E28}"/>
               </a:ext>
             </a:extLst>
           </p:cNvPr>
@@ -10697,7 +10897,7 @@
           <p:cNvPr id="14" name="">
             <a:extLst xmlns:a="http://schemas.openxmlformats.org/drawingml/2006/main">
               <a:ext uri="{FF2B5EF4-FFF2-40B4-BE49-F238E27FC236}">
-                <a16:creationId xmlns:a16="http://schemas.microsoft.com/office/drawing/2014/main" id="{67959F9D-308F-4D6D-B713-78308A740962}"/>
+                <a16:creationId xmlns:a16="http://schemas.microsoft.com/office/drawing/2014/main" id="{4BC6B2B0-1BAD-42F3-B891-F3789FFD841A}"/>
               </a:ext>
             </a:extLst>
           </p:cNvPr>
@@ -10754,7 +10954,7 @@
           <p:cNvPr id="15" name="">
             <a:extLst xmlns:a="http://schemas.openxmlformats.org/drawingml/2006/main">
               <a:ext uri="{FF2B5EF4-FFF2-40B4-BE49-F238E27FC236}">
-                <a16:creationId xmlns:a16="http://schemas.microsoft.com/office/drawing/2014/main" id="{A36E7922-5CC5-48D2-B3DC-8CBE482930F8}"/>
+                <a16:creationId xmlns:a16="http://schemas.microsoft.com/office/drawing/2014/main" id="{C77B9E86-05CD-4BA8-B5EE-3FFD714E2672}"/>
               </a:ext>
             </a:extLst>
           </p:cNvPr>
@@ -10809,7 +11009,7 @@
     </p:spTree>
     <p:extLst>
       <p:ext uri="{BB962C8B-B14F-4D97-AF65-F5344CB8AC3E}">
-        <p14:creationId xmlns:p14="http://schemas.microsoft.com/office/powerpoint/2010/main" val="1992655653"/>
+        <p14:creationId xmlns:p14="http://schemas.microsoft.com/office/powerpoint/2010/main" val="1324262764"/>
       </p:ext>
     </p:extLst>
   </p:cSld>
@@ -10964,7 +11164,7 @@
           <p:cNvPr id="16" name="">
             <a:extLst xmlns:a="http://schemas.openxmlformats.org/drawingml/2006/main">
               <a:ext uri="{FF2B5EF4-FFF2-40B4-BE49-F238E27FC236}">
-                <a16:creationId xmlns:a16="http://schemas.microsoft.com/office/drawing/2014/main" id="{39F60F4C-EBD3-4ADE-8FC1-7E361B16BA82}"/>
+                <a16:creationId xmlns:a16="http://schemas.microsoft.com/office/drawing/2014/main" id="{86FE5553-4DC4-448C-87C1-82BB0C8309A5}"/>
               </a:ext>
             </a:extLst>
           </p:cNvPr>
@@ -10996,7 +11196,7 @@
           <p:cNvPr id="2" name="">
             <a:extLst xmlns:a="http://schemas.openxmlformats.org/drawingml/2006/main">
               <a:ext uri="{FF2B5EF4-FFF2-40B4-BE49-F238E27FC236}">
-                <a16:creationId xmlns:a16="http://schemas.microsoft.com/office/drawing/2014/main" id="{069ABCAE-253F-4F19-BF91-FEB93ED03BD9}"/>
+                <a16:creationId xmlns:a16="http://schemas.microsoft.com/office/drawing/2014/main" id="{FE36FE5B-352B-4739-9929-4F230A1D7E9E}"/>
               </a:ext>
             </a:extLst>
           </p:cNvPr>
@@ -11053,7 +11253,7 @@
           <p:cNvPr id="3" name="">
             <a:extLst xmlns:a="http://schemas.openxmlformats.org/drawingml/2006/main">
               <a:ext uri="{FF2B5EF4-FFF2-40B4-BE49-F238E27FC236}">
-                <a16:creationId xmlns:a16="http://schemas.microsoft.com/office/drawing/2014/main" id="{6B8E0986-741B-4D52-8FD1-A2D0E9BC42C3}"/>
+                <a16:creationId xmlns:a16="http://schemas.microsoft.com/office/drawing/2014/main" id="{C54025B2-33EA-42B4-B82A-6F2A481122BD}"/>
               </a:ext>
             </a:extLst>
           </p:cNvPr>
@@ -11085,7 +11285,7 @@
           <p:cNvPr id="4" name="">
             <a:extLst xmlns:a="http://schemas.openxmlformats.org/drawingml/2006/main">
               <a:ext uri="{FF2B5EF4-FFF2-40B4-BE49-F238E27FC236}">
-                <a16:creationId xmlns:a16="http://schemas.microsoft.com/office/drawing/2014/main" id="{E308C091-4357-4631-9E4C-C048685EA7C8}"/>
+                <a16:creationId xmlns:a16="http://schemas.microsoft.com/office/drawing/2014/main" id="{8C1ADF7C-B3B1-4D68-9BD8-C85421805812}"/>
               </a:ext>
             </a:extLst>
           </p:cNvPr>
@@ -11142,7 +11342,7 @@
           <p:cNvPr id="5" name="">
             <a:extLst xmlns:a="http://schemas.openxmlformats.org/drawingml/2006/main">
               <a:ext uri="{FF2B5EF4-FFF2-40B4-BE49-F238E27FC236}">
-                <a16:creationId xmlns:a16="http://schemas.microsoft.com/office/drawing/2014/main" id="{EDE35D15-49FD-4DA7-8CBF-72F276C6FFC5}"/>
+                <a16:creationId xmlns:a16="http://schemas.microsoft.com/office/drawing/2014/main" id="{8839716A-DE4D-4A56-A280-A32796056B83}"/>
               </a:ext>
             </a:extLst>
           </p:cNvPr>
@@ -11199,7 +11399,7 @@
           <p:cNvPr id="6" name="">
             <a:extLst xmlns:a="http://schemas.openxmlformats.org/drawingml/2006/main">
               <a:ext uri="{FF2B5EF4-FFF2-40B4-BE49-F238E27FC236}">
-                <a16:creationId xmlns:a16="http://schemas.microsoft.com/office/drawing/2014/main" id="{EFFEBEFF-5DB3-414D-8528-5C8E64AD52AC}"/>
+                <a16:creationId xmlns:a16="http://schemas.microsoft.com/office/drawing/2014/main" id="{883A1441-40AE-449A-B172-2EFC060A6D52}"/>
               </a:ext>
             </a:extLst>
           </p:cNvPr>
@@ -11256,7 +11456,7 @@
           <p:cNvPr id="7" name="">
             <a:extLst xmlns:a="http://schemas.openxmlformats.org/drawingml/2006/main">
               <a:ext uri="{FF2B5EF4-FFF2-40B4-BE49-F238E27FC236}">
-                <a16:creationId xmlns:a16="http://schemas.microsoft.com/office/drawing/2014/main" id="{97977C1D-18B9-4BCB-849B-A1BECA447640}"/>
+                <a16:creationId xmlns:a16="http://schemas.microsoft.com/office/drawing/2014/main" id="{248101E4-8036-44A9-B9A7-CDA1A04CEC6B}"/>
               </a:ext>
             </a:extLst>
           </p:cNvPr>
@@ -11288,7 +11488,7 @@
           <p:cNvPr id="8" name="">
             <a:extLst xmlns:a="http://schemas.openxmlformats.org/drawingml/2006/main">
               <a:ext uri="{FF2B5EF4-FFF2-40B4-BE49-F238E27FC236}">
-                <a16:creationId xmlns:a16="http://schemas.microsoft.com/office/drawing/2014/main" id="{135F7B01-88CC-4416-B69B-75E189A8649D}"/>
+                <a16:creationId xmlns:a16="http://schemas.microsoft.com/office/drawing/2014/main" id="{C405DD65-3C08-4928-BB63-AE90AEF1AD3A}"/>
               </a:ext>
             </a:extLst>
           </p:cNvPr>
@@ -11345,7 +11545,7 @@
           <p:cNvPr id="9" name="">
             <a:extLst xmlns:a="http://schemas.openxmlformats.org/drawingml/2006/main">
               <a:ext uri="{FF2B5EF4-FFF2-40B4-BE49-F238E27FC236}">
-                <a16:creationId xmlns:a16="http://schemas.microsoft.com/office/drawing/2014/main" id="{89C0DF6F-DFE5-4097-8A4E-070915E1D3B4}"/>
+                <a16:creationId xmlns:a16="http://schemas.microsoft.com/office/drawing/2014/main" id="{864B9236-0120-4EE5-AC42-BD4EEE6487DF}"/>
               </a:ext>
             </a:extLst>
           </p:cNvPr>
@@ -11406,7 +11606,7 @@
           <p:nvPr/>
         </p:nvPicPr>
         <p:blipFill>
-          <a:blip xmlns:r="http://schemas.openxmlformats.org/officeDocument/2006/relationships" xmlns:a="http://schemas.openxmlformats.org/drawingml/2006/main" r:embed="R9829faa0da334284"/>
+          <a:blip xmlns:r="http://schemas.openxmlformats.org/officeDocument/2006/relationships" xmlns:a="http://schemas.openxmlformats.org/drawingml/2006/main" r:embed="Rc52df222388f4f16"/>
           <a:stretch xmlns:a="http://schemas.openxmlformats.org/drawingml/2006/main"/>
         </p:blipFill>
         <p:spPr>
@@ -11424,7 +11624,7 @@
           <p:cNvPr id="11" name="">
             <a:extLst xmlns:a="http://schemas.openxmlformats.org/drawingml/2006/main">
               <a:ext uri="{FF2B5EF4-FFF2-40B4-BE49-F238E27FC236}">
-                <a16:creationId xmlns:a16="http://schemas.microsoft.com/office/drawing/2014/main" id="{48B22141-552E-48A5-BBBE-A76F0971CFF8}"/>
+                <a16:creationId xmlns:a16="http://schemas.microsoft.com/office/drawing/2014/main" id="{098BDCE9-DBA2-45D8-815F-3E315C84CEEF}"/>
               </a:ext>
             </a:extLst>
           </p:cNvPr>
@@ -11481,7 +11681,7 @@
           <p:cNvPr id="12" name="">
             <a:extLst xmlns:a="http://schemas.openxmlformats.org/drawingml/2006/main">
               <a:ext uri="{FF2B5EF4-FFF2-40B4-BE49-F238E27FC236}">
-                <a16:creationId xmlns:a16="http://schemas.microsoft.com/office/drawing/2014/main" id="{06DE45E2-C963-4D7E-88DB-265EC92E71F0}"/>
+                <a16:creationId xmlns:a16="http://schemas.microsoft.com/office/drawing/2014/main" id="{CD274A73-8114-445D-9B9B-38F53897995B}"/>
               </a:ext>
             </a:extLst>
           </p:cNvPr>
@@ -11538,7 +11738,7 @@
           <p:cNvPr id="13" name="">
             <a:extLst xmlns:a="http://schemas.openxmlformats.org/drawingml/2006/main">
               <a:ext uri="{FF2B5EF4-FFF2-40B4-BE49-F238E27FC236}">
-                <a16:creationId xmlns:a16="http://schemas.microsoft.com/office/drawing/2014/main" id="{C6CEFE70-2FC7-46A8-AEB7-94133483601B}"/>
+                <a16:creationId xmlns:a16="http://schemas.microsoft.com/office/drawing/2014/main" id="{FED5FEAB-6D45-4CEC-B0EE-25BC729A5F09}"/>
               </a:ext>
             </a:extLst>
           </p:cNvPr>
@@ -11570,7 +11770,7 @@
           <p:cNvPr id="14" name="">
             <a:extLst xmlns:a="http://schemas.openxmlformats.org/drawingml/2006/main">
               <a:ext uri="{FF2B5EF4-FFF2-40B4-BE49-F238E27FC236}">
-                <a16:creationId xmlns:a16="http://schemas.microsoft.com/office/drawing/2014/main" id="{DB2DCC88-5EED-4218-B383-B9281EC9F167}"/>
+                <a16:creationId xmlns:a16="http://schemas.microsoft.com/office/drawing/2014/main" id="{9022978E-F920-4489-9CBA-974EADB181F8}"/>
               </a:ext>
             </a:extLst>
           </p:cNvPr>
@@ -11627,7 +11827,7 @@
           <p:cNvPr id="15" name="">
             <a:extLst xmlns:a="http://schemas.openxmlformats.org/drawingml/2006/main">
               <a:ext uri="{FF2B5EF4-FFF2-40B4-BE49-F238E27FC236}">
-                <a16:creationId xmlns:a16="http://schemas.microsoft.com/office/drawing/2014/main" id="{53718B41-FBB6-4D99-95E6-296314B25051}"/>
+                <a16:creationId xmlns:a16="http://schemas.microsoft.com/office/drawing/2014/main" id="{863E24E5-D3BB-44D3-AF32-6555821313F0}"/>
               </a:ext>
             </a:extLst>
           </p:cNvPr>
@@ -11682,7 +11882,7 @@
     </p:spTree>
     <p:extLst>
       <p:ext uri="{BB962C8B-B14F-4D97-AF65-F5344CB8AC3E}">
-        <p14:creationId xmlns:p14="http://schemas.microsoft.com/office/powerpoint/2010/main" val="652363699"/>
+        <p14:creationId xmlns:p14="http://schemas.microsoft.com/office/powerpoint/2010/main" val="71045801"/>
       </p:ext>
     </p:extLst>
   </p:cSld>
@@ -11837,7 +12037,7 @@
           <p:cNvPr id="23" name="">
             <a:extLst xmlns:a="http://schemas.openxmlformats.org/drawingml/2006/main">
               <a:ext uri="{FF2B5EF4-FFF2-40B4-BE49-F238E27FC236}">
-                <a16:creationId xmlns:a16="http://schemas.microsoft.com/office/drawing/2014/main" id="{77A5C2C2-0DE1-4C9F-9BCE-3DEA870DCA4A}"/>
+                <a16:creationId xmlns:a16="http://schemas.microsoft.com/office/drawing/2014/main" id="{6C79516E-8A91-44A8-8A3E-6CFBF26FAE6B}"/>
               </a:ext>
             </a:extLst>
           </p:cNvPr>
@@ -11869,7 +12069,7 @@
           <p:cNvPr id="2" name="">
             <a:extLst xmlns:a="http://schemas.openxmlformats.org/drawingml/2006/main">
               <a:ext uri="{FF2B5EF4-FFF2-40B4-BE49-F238E27FC236}">
-                <a16:creationId xmlns:a16="http://schemas.microsoft.com/office/drawing/2014/main" id="{714637E0-42F3-4404-8EAA-D7DDA397A131}"/>
+                <a16:creationId xmlns:a16="http://schemas.microsoft.com/office/drawing/2014/main" id="{A4A6A0FE-440F-497F-8D4F-F843D442CA3C}"/>
               </a:ext>
             </a:extLst>
           </p:cNvPr>
@@ -11926,7 +12126,7 @@
           <p:cNvPr id="3" name="">
             <a:extLst xmlns:a="http://schemas.openxmlformats.org/drawingml/2006/main">
               <a:ext uri="{FF2B5EF4-FFF2-40B4-BE49-F238E27FC236}">
-                <a16:creationId xmlns:a16="http://schemas.microsoft.com/office/drawing/2014/main" id="{ADD5BC92-A88F-4326-ABD2-CADB707AB2EA}"/>
+                <a16:creationId xmlns:a16="http://schemas.microsoft.com/office/drawing/2014/main" id="{AE8746A8-70C0-4AA7-9356-8AB00E3C4C32}"/>
               </a:ext>
             </a:extLst>
           </p:cNvPr>
@@ -11958,7 +12158,7 @@
           <p:cNvPr id="4" name="">
             <a:extLst xmlns:a="http://schemas.openxmlformats.org/drawingml/2006/main">
               <a:ext uri="{FF2B5EF4-FFF2-40B4-BE49-F238E27FC236}">
-                <a16:creationId xmlns:a16="http://schemas.microsoft.com/office/drawing/2014/main" id="{368D8E77-58DB-4644-AD36-497A30028FFF}"/>
+                <a16:creationId xmlns:a16="http://schemas.microsoft.com/office/drawing/2014/main" id="{DF53369A-3893-48C0-8AE7-5DBC939AA4A3}"/>
               </a:ext>
             </a:extLst>
           </p:cNvPr>
@@ -12015,7 +12215,7 @@
           <p:cNvPr id="5" name="">
             <a:extLst xmlns:a="http://schemas.openxmlformats.org/drawingml/2006/main">
               <a:ext uri="{FF2B5EF4-FFF2-40B4-BE49-F238E27FC236}">
-                <a16:creationId xmlns:a16="http://schemas.microsoft.com/office/drawing/2014/main" id="{F8E6942F-D49B-4198-A44A-B21F5590B794}"/>
+                <a16:creationId xmlns:a16="http://schemas.microsoft.com/office/drawing/2014/main" id="{1D1C03CD-1056-4928-B39D-DDF65F64963C}"/>
               </a:ext>
             </a:extLst>
           </p:cNvPr>
@@ -12072,7 +12272,7 @@
           <p:cNvPr id="6" name="">
             <a:extLst xmlns:a="http://schemas.openxmlformats.org/drawingml/2006/main">
               <a:ext uri="{FF2B5EF4-FFF2-40B4-BE49-F238E27FC236}">
-                <a16:creationId xmlns:a16="http://schemas.microsoft.com/office/drawing/2014/main" id="{F3732079-449B-4021-8925-F9C151CFEF42}"/>
+                <a16:creationId xmlns:a16="http://schemas.microsoft.com/office/drawing/2014/main" id="{C03A8617-57CD-47B3-BF66-BC4260F25E38}"/>
               </a:ext>
             </a:extLst>
           </p:cNvPr>
@@ -12129,7 +12329,7 @@
           <p:cNvPr id="7" name="">
             <a:extLst xmlns:a="http://schemas.openxmlformats.org/drawingml/2006/main">
               <a:ext uri="{FF2B5EF4-FFF2-40B4-BE49-F238E27FC236}">
-                <a16:creationId xmlns:a16="http://schemas.microsoft.com/office/drawing/2014/main" id="{083F8DB5-E200-4CB0-B8E5-DBEA417A1F6F}"/>
+                <a16:creationId xmlns:a16="http://schemas.microsoft.com/office/drawing/2014/main" id="{3DADFB35-95DC-4185-9034-A70354D73AD9}"/>
               </a:ext>
             </a:extLst>
           </p:cNvPr>
@@ -12161,7 +12361,7 @@
           <p:cNvPr id="8" name="">
             <a:extLst xmlns:a="http://schemas.openxmlformats.org/drawingml/2006/main">
               <a:ext uri="{FF2B5EF4-FFF2-40B4-BE49-F238E27FC236}">
-                <a16:creationId xmlns:a16="http://schemas.microsoft.com/office/drawing/2014/main" id="{27724E72-5F1E-47CA-BDCB-D0F9CF5A0C39}"/>
+                <a16:creationId xmlns:a16="http://schemas.microsoft.com/office/drawing/2014/main" id="{8AFE95CB-28D2-40F4-9C72-EC6A99707C0A}"/>
               </a:ext>
             </a:extLst>
           </p:cNvPr>
@@ -12218,7 +12418,7 @@
           <p:cNvPr id="9" name="">
             <a:extLst xmlns:a="http://schemas.openxmlformats.org/drawingml/2006/main">
               <a:ext uri="{FF2B5EF4-FFF2-40B4-BE49-F238E27FC236}">
-                <a16:creationId xmlns:a16="http://schemas.microsoft.com/office/drawing/2014/main" id="{4C5ADD0E-3DEA-4500-80F4-DB29A0B26CD0}"/>
+                <a16:creationId xmlns:a16="http://schemas.microsoft.com/office/drawing/2014/main" id="{ECC18BCC-9FF8-423B-9BFF-DD0D9669BB3B}"/>
               </a:ext>
             </a:extLst>
           </p:cNvPr>
@@ -12275,7 +12475,7 @@
           <p:cNvPr id="10" name="">
             <a:extLst xmlns:a="http://schemas.openxmlformats.org/drawingml/2006/main">
               <a:ext uri="{FF2B5EF4-FFF2-40B4-BE49-F238E27FC236}">
-                <a16:creationId xmlns:a16="http://schemas.microsoft.com/office/drawing/2014/main" id="{F9B06444-B157-43A2-9151-17FEB2DE5BDE}"/>
+                <a16:creationId xmlns:a16="http://schemas.microsoft.com/office/drawing/2014/main" id="{7BA4B497-D34F-4CE0-B026-204CDBB51286}"/>
               </a:ext>
             </a:extLst>
           </p:cNvPr>
@@ -12309,7 +12509,7 @@
           <p:cNvPr id="11" name="">
             <a:extLst xmlns:a="http://schemas.openxmlformats.org/drawingml/2006/main">
               <a:ext uri="{FF2B5EF4-FFF2-40B4-BE49-F238E27FC236}">
-                <a16:creationId xmlns:a16="http://schemas.microsoft.com/office/drawing/2014/main" id="{BFEB9341-AC5F-4B30-87A6-39C09EE25957}"/>
+                <a16:creationId xmlns:a16="http://schemas.microsoft.com/office/drawing/2014/main" id="{3F01C56A-75A7-4BAF-BF2C-7542642593BF}"/>
               </a:ext>
             </a:extLst>
           </p:cNvPr>
@@ -12341,7 +12541,7 @@
           <p:cNvPr id="12" name="">
             <a:extLst xmlns:a="http://schemas.openxmlformats.org/drawingml/2006/main">
               <a:ext uri="{FF2B5EF4-FFF2-40B4-BE49-F238E27FC236}">
-                <a16:creationId xmlns:a16="http://schemas.microsoft.com/office/drawing/2014/main" id="{CD268EDA-EA7D-412A-A1F8-09C98C79CA3D}"/>
+                <a16:creationId xmlns:a16="http://schemas.microsoft.com/office/drawing/2014/main" id="{A90279B3-49E0-48C6-B565-F57FBE25B538}"/>
               </a:ext>
             </a:extLst>
           </p:cNvPr>
@@ -12398,7 +12598,7 @@
           <p:cNvPr id="13" name="">
             <a:extLst xmlns:a="http://schemas.openxmlformats.org/drawingml/2006/main">
               <a:ext uri="{FF2B5EF4-FFF2-40B4-BE49-F238E27FC236}">
-                <a16:creationId xmlns:a16="http://schemas.microsoft.com/office/drawing/2014/main" id="{6183BE53-29FB-424E-B2B5-4800B624B410}"/>
+                <a16:creationId xmlns:a16="http://schemas.microsoft.com/office/drawing/2014/main" id="{D12E8CF6-846E-41E4-AA86-FE0359EF5CF3}"/>
               </a:ext>
             </a:extLst>
           </p:cNvPr>
@@ -12455,7 +12655,7 @@
           <p:cNvPr id="14" name="">
             <a:extLst xmlns:a="http://schemas.openxmlformats.org/drawingml/2006/main">
               <a:ext uri="{FF2B5EF4-FFF2-40B4-BE49-F238E27FC236}">
-                <a16:creationId xmlns:a16="http://schemas.microsoft.com/office/drawing/2014/main" id="{2DC621BE-29EE-4DF3-BA19-DD4362B702B6}"/>
+                <a16:creationId xmlns:a16="http://schemas.microsoft.com/office/drawing/2014/main" id="{7A0A8B43-541C-4ACB-9FCD-7C206D96C67A}"/>
               </a:ext>
             </a:extLst>
           </p:cNvPr>
@@ -12489,7 +12689,7 @@
           <p:cNvPr id="15" name="">
             <a:extLst xmlns:a="http://schemas.openxmlformats.org/drawingml/2006/main">
               <a:ext uri="{FF2B5EF4-FFF2-40B4-BE49-F238E27FC236}">
-                <a16:creationId xmlns:a16="http://schemas.microsoft.com/office/drawing/2014/main" id="{275D5CBA-73FE-4E3D-B17A-BFC8695BA58A}"/>
+                <a16:creationId xmlns:a16="http://schemas.microsoft.com/office/drawing/2014/main" id="{1EE4CDB6-3200-434D-805E-B14EDB69FBDC}"/>
               </a:ext>
             </a:extLst>
           </p:cNvPr>
@@ -12521,7 +12721,7 @@
           <p:cNvPr id="16" name="">
             <a:extLst xmlns:a="http://schemas.openxmlformats.org/drawingml/2006/main">
               <a:ext uri="{FF2B5EF4-FFF2-40B4-BE49-F238E27FC236}">
-                <a16:creationId xmlns:a16="http://schemas.microsoft.com/office/drawing/2014/main" id="{8190B0AD-1BD9-45F7-B380-93BB39A6E195}"/>
+                <a16:creationId xmlns:a16="http://schemas.microsoft.com/office/drawing/2014/main" id="{047535F7-45E1-47B0-A004-E9DB97852493}"/>
               </a:ext>
             </a:extLst>
           </p:cNvPr>
@@ -12578,7 +12778,7 @@
           <p:cNvPr id="17" name="">
             <a:extLst xmlns:a="http://schemas.openxmlformats.org/drawingml/2006/main">
               <a:ext uri="{FF2B5EF4-FFF2-40B4-BE49-F238E27FC236}">
-                <a16:creationId xmlns:a16="http://schemas.microsoft.com/office/drawing/2014/main" id="{FF13F586-18DA-4648-B90B-25D29CF88AB5}"/>
+                <a16:creationId xmlns:a16="http://schemas.microsoft.com/office/drawing/2014/main" id="{C6F84879-BF96-415A-B5FE-3B21A1EA9CF8}"/>
               </a:ext>
             </a:extLst>
           </p:cNvPr>
@@ -12635,7 +12835,7 @@
           <p:cNvPr id="18" name="">
             <a:extLst xmlns:a="http://schemas.openxmlformats.org/drawingml/2006/main">
               <a:ext uri="{FF2B5EF4-FFF2-40B4-BE49-F238E27FC236}">
-                <a16:creationId xmlns:a16="http://schemas.microsoft.com/office/drawing/2014/main" id="{B6198E60-8362-4176-B45B-9FEBF3555EB8}"/>
+                <a16:creationId xmlns:a16="http://schemas.microsoft.com/office/drawing/2014/main" id="{859CED36-40E2-4BBF-875C-A4872C935F80}"/>
               </a:ext>
             </a:extLst>
           </p:cNvPr>
@@ -12669,7 +12869,7 @@
           <p:cNvPr id="19" name="">
             <a:extLst xmlns:a="http://schemas.openxmlformats.org/drawingml/2006/main">
               <a:ext uri="{FF2B5EF4-FFF2-40B4-BE49-F238E27FC236}">
-                <a16:creationId xmlns:a16="http://schemas.microsoft.com/office/drawing/2014/main" id="{7C0B29BB-B8DA-40B2-B70B-22D774E50CDF}"/>
+                <a16:creationId xmlns:a16="http://schemas.microsoft.com/office/drawing/2014/main" id="{CF700A29-F926-42B6-8343-2F43A2D88513}"/>
               </a:ext>
             </a:extLst>
           </p:cNvPr>
@@ -12701,7 +12901,7 @@
           <p:cNvPr id="20" name="">
             <a:extLst xmlns:a="http://schemas.openxmlformats.org/drawingml/2006/main">
               <a:ext uri="{FF2B5EF4-FFF2-40B4-BE49-F238E27FC236}">
-                <a16:creationId xmlns:a16="http://schemas.microsoft.com/office/drawing/2014/main" id="{E0B088F9-B29F-47C9-B07F-58DEAD5BCB92}"/>
+                <a16:creationId xmlns:a16="http://schemas.microsoft.com/office/drawing/2014/main" id="{E975F4E5-64AB-47E9-A964-6BC99A784D05}"/>
               </a:ext>
             </a:extLst>
           </p:cNvPr>
@@ -12758,7 +12958,7 @@
           <p:cNvPr id="21" name="">
             <a:extLst xmlns:a="http://schemas.openxmlformats.org/drawingml/2006/main">
               <a:ext uri="{FF2B5EF4-FFF2-40B4-BE49-F238E27FC236}">
-                <a16:creationId xmlns:a16="http://schemas.microsoft.com/office/drawing/2014/main" id="{16152F65-6296-4AAA-868C-BCE19AE40F3A}"/>
+                <a16:creationId xmlns:a16="http://schemas.microsoft.com/office/drawing/2014/main" id="{7F031709-5C27-41F7-8362-46B6332364BD}"/>
               </a:ext>
             </a:extLst>
           </p:cNvPr>
@@ -12815,7 +13015,7 @@
           <p:cNvPr id="22" name="">
             <a:extLst xmlns:a="http://schemas.openxmlformats.org/drawingml/2006/main">
               <a:ext uri="{FF2B5EF4-FFF2-40B4-BE49-F238E27FC236}">
-                <a16:creationId xmlns:a16="http://schemas.microsoft.com/office/drawing/2014/main" id="{FFAA0B75-E5C2-4E31-B143-572D3627EC6B}"/>
+                <a16:creationId xmlns:a16="http://schemas.microsoft.com/office/drawing/2014/main" id="{25EAFA3F-465D-4B6E-AAB9-B2F6848A40EE}"/>
               </a:ext>
             </a:extLst>
           </p:cNvPr>
@@ -12870,7 +13070,7 @@
     </p:spTree>
     <p:extLst>
       <p:ext uri="{BB962C8B-B14F-4D97-AF65-F5344CB8AC3E}">
-        <p14:creationId xmlns:p14="http://schemas.microsoft.com/office/powerpoint/2010/main" val="1131942182"/>
+        <p14:creationId xmlns:p14="http://schemas.microsoft.com/office/powerpoint/2010/main" val="1612778069"/>
       </p:ext>
     </p:extLst>
   </p:cSld>
@@ -13071,7 +13271,7 @@
           <p:cNvPr id="22" name="">
             <a:extLst xmlns:a="http://schemas.openxmlformats.org/drawingml/2006/main">
               <a:ext uri="{FF2B5EF4-FFF2-40B4-BE49-F238E27FC236}">
-                <a16:creationId xmlns:a16="http://schemas.microsoft.com/office/drawing/2014/main" id="{6417CB2D-7EA4-4059-B93D-15860FEB0A2C}"/>
+                <a16:creationId xmlns:a16="http://schemas.microsoft.com/office/drawing/2014/main" id="{0C6E763A-EC24-4470-8EB0-BAC1DAC22E08}"/>
               </a:ext>
             </a:extLst>
           </p:cNvPr>
@@ -13103,7 +13303,7 @@
           <p:cNvPr id="2" name="">
             <a:extLst xmlns:a="http://schemas.openxmlformats.org/drawingml/2006/main">
               <a:ext uri="{FF2B5EF4-FFF2-40B4-BE49-F238E27FC236}">
-                <a16:creationId xmlns:a16="http://schemas.microsoft.com/office/drawing/2014/main" id="{A4C30C42-EA53-4BA5-9091-0345367FA532}"/>
+                <a16:creationId xmlns:a16="http://schemas.microsoft.com/office/drawing/2014/main" id="{6DBAD265-4F47-4F53-8A89-D7E39EB55918}"/>
               </a:ext>
             </a:extLst>
           </p:cNvPr>
@@ -13160,7 +13360,7 @@
           <p:cNvPr id="3" name="">
             <a:extLst xmlns:a="http://schemas.openxmlformats.org/drawingml/2006/main">
               <a:ext uri="{FF2B5EF4-FFF2-40B4-BE49-F238E27FC236}">
-                <a16:creationId xmlns:a16="http://schemas.microsoft.com/office/drawing/2014/main" id="{7F6C9040-C8EA-4BA3-B908-F4807E5912CC}"/>
+                <a16:creationId xmlns:a16="http://schemas.microsoft.com/office/drawing/2014/main" id="{8FD8A865-1DF9-4350-8ACB-8DBEB3BA0319}"/>
               </a:ext>
             </a:extLst>
           </p:cNvPr>
@@ -13192,7 +13392,7 @@
           <p:cNvPr id="4" name="">
             <a:extLst xmlns:a="http://schemas.openxmlformats.org/drawingml/2006/main">
               <a:ext uri="{FF2B5EF4-FFF2-40B4-BE49-F238E27FC236}">
-                <a16:creationId xmlns:a16="http://schemas.microsoft.com/office/drawing/2014/main" id="{938AB2A5-9D9E-435C-B3B5-247E5C76F568}"/>
+                <a16:creationId xmlns:a16="http://schemas.microsoft.com/office/drawing/2014/main" id="{3D4F4934-AC16-46C4-BC9F-792DE2624621}"/>
               </a:ext>
             </a:extLst>
           </p:cNvPr>
@@ -13249,7 +13449,7 @@
           <p:cNvPr id="5" name="">
             <a:extLst xmlns:a="http://schemas.openxmlformats.org/drawingml/2006/main">
               <a:ext uri="{FF2B5EF4-FFF2-40B4-BE49-F238E27FC236}">
-                <a16:creationId xmlns:a16="http://schemas.microsoft.com/office/drawing/2014/main" id="{B4FCCC77-DFDD-4AAF-907E-36FB777C206E}"/>
+                <a16:creationId xmlns:a16="http://schemas.microsoft.com/office/drawing/2014/main" id="{62A409C5-6324-4F27-9DB7-555DFB62DED3}"/>
               </a:ext>
             </a:extLst>
           </p:cNvPr>
@@ -13306,7 +13506,7 @@
           <p:cNvPr id="6" name="">
             <a:extLst xmlns:a="http://schemas.openxmlformats.org/drawingml/2006/main">
               <a:ext uri="{FF2B5EF4-FFF2-40B4-BE49-F238E27FC236}">
-                <a16:creationId xmlns:a16="http://schemas.microsoft.com/office/drawing/2014/main" id="{363C3CB2-CCB1-4DBC-BA74-E22FA5A7A74C}"/>
+                <a16:creationId xmlns:a16="http://schemas.microsoft.com/office/drawing/2014/main" id="{CCB5DEDF-B005-4C67-97B0-9B5C990E479B}"/>
               </a:ext>
             </a:extLst>
           </p:cNvPr>
@@ -13363,7 +13563,7 @@
           <p:cNvPr id="7" name="">
             <a:extLst xmlns:a="http://schemas.openxmlformats.org/drawingml/2006/main">
               <a:ext uri="{FF2B5EF4-FFF2-40B4-BE49-F238E27FC236}">
-                <a16:creationId xmlns:a16="http://schemas.microsoft.com/office/drawing/2014/main" id="{DB298C92-2FDC-44E0-825E-2A10E608DF2C}"/>
+                <a16:creationId xmlns:a16="http://schemas.microsoft.com/office/drawing/2014/main" id="{90C008DB-4B36-4DF9-8D52-6C5D5C80DE6E}"/>
               </a:ext>
             </a:extLst>
           </p:cNvPr>
@@ -13395,7 +13595,7 @@
           <p:cNvPr id="8" name="">
             <a:extLst xmlns:a="http://schemas.openxmlformats.org/drawingml/2006/main">
               <a:ext uri="{FF2B5EF4-FFF2-40B4-BE49-F238E27FC236}">
-                <a16:creationId xmlns:a16="http://schemas.microsoft.com/office/drawing/2014/main" id="{F1DFFF40-020A-42F7-B4AA-00B9F6673BE8}"/>
+                <a16:creationId xmlns:a16="http://schemas.microsoft.com/office/drawing/2014/main" id="{B83C0EE9-7CC7-45BE-A169-C9C7185E5D85}"/>
               </a:ext>
             </a:extLst>
           </p:cNvPr>
@@ -13452,7 +13652,7 @@
           <p:cNvPr id="9" name="">
             <a:extLst xmlns:a="http://schemas.openxmlformats.org/drawingml/2006/main">
               <a:ext uri="{FF2B5EF4-FFF2-40B4-BE49-F238E27FC236}">
-                <a16:creationId xmlns:a16="http://schemas.microsoft.com/office/drawing/2014/main" id="{AE859D4D-295C-4DEF-BF76-3AF081F9D8B4}"/>
+                <a16:creationId xmlns:a16="http://schemas.microsoft.com/office/drawing/2014/main" id="{08A67277-C733-4AD0-BCEE-E95BAC32EB75}"/>
               </a:ext>
             </a:extLst>
           </p:cNvPr>
@@ -13509,7 +13709,7 @@
           <p:cNvPr id="10" name="">
             <a:extLst xmlns:a="http://schemas.openxmlformats.org/drawingml/2006/main">
               <a:ext uri="{FF2B5EF4-FFF2-40B4-BE49-F238E27FC236}">
-                <a16:creationId xmlns:a16="http://schemas.microsoft.com/office/drawing/2014/main" id="{8930468F-1778-4019-8697-6C4CF73F2057}"/>
+                <a16:creationId xmlns:a16="http://schemas.microsoft.com/office/drawing/2014/main" id="{BAB6E6D1-675E-4040-984C-93BBD045F95B}"/>
               </a:ext>
             </a:extLst>
           </p:cNvPr>
@@ -13543,7 +13743,7 @@
           <p:cNvPr id="11" name="">
             <a:extLst xmlns:a="http://schemas.openxmlformats.org/drawingml/2006/main">
               <a:ext uri="{FF2B5EF4-FFF2-40B4-BE49-F238E27FC236}">
-                <a16:creationId xmlns:a16="http://schemas.microsoft.com/office/drawing/2014/main" id="{06B0F47E-D1F7-4B7E-A751-8AB35944E9F8}"/>
+                <a16:creationId xmlns:a16="http://schemas.microsoft.com/office/drawing/2014/main" id="{C44BD352-FA3A-4099-A62F-8199C8F273F0}"/>
               </a:ext>
             </a:extLst>
           </p:cNvPr>
@@ -13575,7 +13775,7 @@
           <p:cNvPr id="12" name="">
             <a:extLst xmlns:a="http://schemas.openxmlformats.org/drawingml/2006/main">
               <a:ext uri="{FF2B5EF4-FFF2-40B4-BE49-F238E27FC236}">
-                <a16:creationId xmlns:a16="http://schemas.microsoft.com/office/drawing/2014/main" id="{BC48222E-9589-4F7B-8DCD-2261F8FA6FCE}"/>
+                <a16:creationId xmlns:a16="http://schemas.microsoft.com/office/drawing/2014/main" id="{8DAA8E1E-CF34-42B0-BC9F-D599521DAA6B}"/>
               </a:ext>
             </a:extLst>
           </p:cNvPr>
@@ -13632,7 +13832,7 @@
           <p:cNvPr id="13" name="">
             <a:extLst xmlns:a="http://schemas.openxmlformats.org/drawingml/2006/main">
               <a:ext uri="{FF2B5EF4-FFF2-40B4-BE49-F238E27FC236}">
-                <a16:creationId xmlns:a16="http://schemas.microsoft.com/office/drawing/2014/main" id="{DED8DA01-7671-4118-BCF9-4B53ACA46326}"/>
+                <a16:creationId xmlns:a16="http://schemas.microsoft.com/office/drawing/2014/main" id="{CC07FCE4-8F55-4FFE-80AF-ED6C52906FD5}"/>
               </a:ext>
             </a:extLst>
           </p:cNvPr>
@@ -13689,7 +13889,7 @@
           <p:cNvPr id="14" name="">
             <a:extLst xmlns:a="http://schemas.openxmlformats.org/drawingml/2006/main">
               <a:ext uri="{FF2B5EF4-FFF2-40B4-BE49-F238E27FC236}">
-                <a16:creationId xmlns:a16="http://schemas.microsoft.com/office/drawing/2014/main" id="{F8E72E1A-384F-4624-AC4C-83031F17688C}"/>
+                <a16:creationId xmlns:a16="http://schemas.microsoft.com/office/drawing/2014/main" id="{F95D3B70-4C10-4503-A3D2-DE56927EE470}"/>
               </a:ext>
             </a:extLst>
           </p:cNvPr>
@@ -13723,7 +13923,7 @@
           <p:cNvPr id="15" name="">
             <a:extLst xmlns:a="http://schemas.openxmlformats.org/drawingml/2006/main">
               <a:ext uri="{FF2B5EF4-FFF2-40B4-BE49-F238E27FC236}">
-                <a16:creationId xmlns:a16="http://schemas.microsoft.com/office/drawing/2014/main" id="{80306E49-B972-405B-A156-5BB047FD151F}"/>
+                <a16:creationId xmlns:a16="http://schemas.microsoft.com/office/drawing/2014/main" id="{D73D2FB7-F824-4300-B04F-397795E3633A}"/>
               </a:ext>
             </a:extLst>
           </p:cNvPr>
@@ -13755,7 +13955,7 @@
           <p:cNvPr id="16" name="">
             <a:extLst xmlns:a="http://schemas.openxmlformats.org/drawingml/2006/main">
               <a:ext uri="{FF2B5EF4-FFF2-40B4-BE49-F238E27FC236}">
-                <a16:creationId xmlns:a16="http://schemas.microsoft.com/office/drawing/2014/main" id="{B21B0444-0E1A-47F6-B037-62CAECDE8DFB}"/>
+                <a16:creationId xmlns:a16="http://schemas.microsoft.com/office/drawing/2014/main" id="{78F75D94-E33D-49E9-B8F1-4F587FF653C2}"/>
               </a:ext>
             </a:extLst>
           </p:cNvPr>
@@ -13812,7 +14012,7 @@
           <p:cNvPr id="17" name="">
             <a:extLst xmlns:a="http://schemas.openxmlformats.org/drawingml/2006/main">
               <a:ext uri="{FF2B5EF4-FFF2-40B4-BE49-F238E27FC236}">
-                <a16:creationId xmlns:a16="http://schemas.microsoft.com/office/drawing/2014/main" id="{18FD1500-6192-4F02-8589-D19ADDC814CF}"/>
+                <a16:creationId xmlns:a16="http://schemas.microsoft.com/office/drawing/2014/main" id="{25D35110-1131-4B15-BA6B-F7B1DCBA8F70}"/>
               </a:ext>
             </a:extLst>
           </p:cNvPr>
@@ -13869,7 +14069,7 @@
           <p:cNvPr id="18" name="">
             <a:extLst xmlns:a="http://schemas.openxmlformats.org/drawingml/2006/main">
               <a:ext uri="{FF2B5EF4-FFF2-40B4-BE49-F238E27FC236}">
-                <a16:creationId xmlns:a16="http://schemas.microsoft.com/office/drawing/2014/main" id="{18A40959-DB69-4A11-94D4-BA2066EF8886}"/>
+                <a16:creationId xmlns:a16="http://schemas.microsoft.com/office/drawing/2014/main" id="{A898BCF4-3E99-4C41-A3CE-865D4673C35B}"/>
               </a:ext>
             </a:extLst>
           </p:cNvPr>
@@ -13903,7 +14103,7 @@
           <p:cNvPr id="19" name="">
             <a:extLst xmlns:a="http://schemas.openxmlformats.org/drawingml/2006/main">
               <a:ext uri="{FF2B5EF4-FFF2-40B4-BE49-F238E27FC236}">
-                <a16:creationId xmlns:a16="http://schemas.microsoft.com/office/drawing/2014/main" id="{E8B74D88-8B2D-44D6-8631-A7317D6C75C4}"/>
+                <a16:creationId xmlns:a16="http://schemas.microsoft.com/office/drawing/2014/main" id="{35E6A7D1-1EC5-4DCB-BBB1-AA8C538838CA}"/>
               </a:ext>
             </a:extLst>
           </p:cNvPr>
@@ -13935,7 +14135,7 @@
           <p:cNvPr id="20" name="">
             <a:extLst xmlns:a="http://schemas.openxmlformats.org/drawingml/2006/main">
               <a:ext uri="{FF2B5EF4-FFF2-40B4-BE49-F238E27FC236}">
-                <a16:creationId xmlns:a16="http://schemas.microsoft.com/office/drawing/2014/main" id="{ADDB6D33-394F-46E0-9B0A-9C1BAA13F001}"/>
+                <a16:creationId xmlns:a16="http://schemas.microsoft.com/office/drawing/2014/main" id="{6B121C74-C15F-40BD-A781-84D45C1BFEC8}"/>
               </a:ext>
             </a:extLst>
           </p:cNvPr>
@@ -13992,7 +14192,7 @@
           <p:cNvPr id="21" name="">
             <a:extLst xmlns:a="http://schemas.openxmlformats.org/drawingml/2006/main">
               <a:ext uri="{FF2B5EF4-FFF2-40B4-BE49-F238E27FC236}">
-                <a16:creationId xmlns:a16="http://schemas.microsoft.com/office/drawing/2014/main" id="{9E2405CD-032C-4BB0-975A-6A0F48111A7F}"/>
+                <a16:creationId xmlns:a16="http://schemas.microsoft.com/office/drawing/2014/main" id="{33BB2B63-78E1-4B0F-8B5A-72F6E3FC0F0B}"/>
               </a:ext>
             </a:extLst>
           </p:cNvPr>
@@ -14047,7 +14247,7 @@
     </p:spTree>
     <p:extLst>
       <p:ext uri="{BB962C8B-B14F-4D97-AF65-F5344CB8AC3E}">
-        <p14:creationId xmlns:p14="http://schemas.microsoft.com/office/powerpoint/2010/main" val="608668035"/>
+        <p14:creationId xmlns:p14="http://schemas.microsoft.com/office/powerpoint/2010/main" val="619251329"/>
       </p:ext>
     </p:extLst>
   </p:cSld>
